--- a/10-Knowledge-Products/KP1-GEA/videos/module_3/en/decks/KP1_M3_3.6_Deck_v0.2.pptx
+++ b/10-Knowledge-Products/KP1-GEA/videos/module_3/en/decks/KP1_M3_3.6_Deck_v0.2.pptx
@@ -14,14 +14,14 @@
     <p:handoutMasterId r:id="rId47"/>
   </p:handoutMasterIdLst>
   <p:sldIdLst>
-    <p:sldId id="2681" r:id="rId8"/>
-    <p:sldId id="2734" r:id="rId56"/>
-    <p:sldId id="2735" r:id="rId57"/>
-    <p:sldId id="2736" r:id="rId58"/>
-    <p:sldId id="2737" r:id="rId59"/>
-    <p:sldId id="2738" r:id="rId60"/>
     <p:sldId id="2739" r:id="rId61"/>
     <p:sldId id="2740" r:id="rId62"/>
+    <p:sldId id="2741" r:id="rId63"/>
+    <p:sldId id="2742" r:id="rId64"/>
+    <p:sldId id="2743" r:id="rId65"/>
+    <p:sldId id="2744" r:id="rId66"/>
+    <p:sldId id="2745" r:id="rId67"/>
+    <p:sldId id="2746" r:id="rId68"/>
   </p:sldIdLst>
   <p:sldSz cx="12192000" cy="6858000"/>
   <p:notesSz cx="6858000" cy="9144000"/>
@@ -888,438 +888,6 @@
 </p:notesMaster>
 </file>
 
-<file path=ppt/notesSlides/notesSlide21.xml><?xml version="1.0" encoding="utf-8"?>
-<p:notes xmlns:a="http://schemas.openxmlformats.org/drawingml/2006/main" xmlns:p="http://schemas.openxmlformats.org/presentationml/2006/main" xmlns:r="http://schemas.openxmlformats.org/officeDocument/2006/relationships">
-  <p:cSld>
-    <p:spTree>
-      <p:nvGrpSpPr>
-        <p:cNvPr id="1" name=""/>
-        <p:cNvGrpSpPr/>
-        <p:nvPr/>
-      </p:nvGrpSpPr>
-      <p:grpSpPr>
-        <a:xfrm>
-          <a:off x="0" y="0"/>
-          <a:ext cx="0" cy="0"/>
-          <a:chOff x="0" y="0"/>
-          <a:chExt cx="0" cy="0"/>
-        </a:xfrm>
-      </p:grpSpPr>
-      <p:sp>
-        <p:nvSpPr>
-          <p:cNvPr id="2" name="Slide Image Placeholder 1"/>
-          <p:cNvSpPr>
-            <a:spLocks noGrp="1"/>
-          </p:cNvSpPr>
-          <p:nvPr>
-            <p:ph type="sldImg" idx="2"/>
-          </p:nvPr>
-        </p:nvSpPr>
-        <p:spPr/>
-      </p:sp>
-      <p:sp>
-        <p:nvSpPr>
-          <p:cNvPr id="3" name="Notes Placeholder 2"/>
-          <p:cNvSpPr>
-            <a:spLocks noGrp="1"/>
-          </p:cNvSpPr>
-          <p:nvPr>
-            <p:ph type="body" idx="3" sz="quarter"/>
-          </p:nvPr>
-        </p:nvSpPr>
-        <p:spPr/>
-        <p:txBody>
-          <a:bodyPr/>
-          <a:lstStyle/>
-          <a:p>
-            <a:r>
-              <a:t>Title card for standalone video 3.6. Content slides are identical to the corresponding section of the combined deck KP1_M3_Deck_v0.2.pptx; voice-over is in each slide’s notes.</a:t>
-            </a:r>
-          </a:p>
-        </p:txBody>
-      </p:sp>
-      <p:sp>
-        <p:nvSpPr>
-          <p:cNvPr id="4" name="Slide Number Placeholder 3"/>
-          <p:cNvSpPr>
-            <a:spLocks noGrp="1"/>
-          </p:cNvSpPr>
-          <p:nvPr>
-            <p:ph type="sldNum" idx="5" sz="quarter"/>
-          </p:nvPr>
-        </p:nvSpPr>
-        <p:spPr/>
-      </p:sp>
-    </p:spTree>
-  </p:cSld>
-  <p:clrMapOvr>
-    <a:masterClrMapping/>
-  </p:clrMapOvr>
-</p:notes>
-</file>
-
-<file path=ppt/notesSlides/notesSlide41.xml><?xml version="1.0" encoding="utf-8"?>
-<p:notes xmlns:a="http://schemas.openxmlformats.org/drawingml/2006/main" xmlns:p="http://schemas.openxmlformats.org/presentationml/2006/main" xmlns:r="http://schemas.openxmlformats.org/officeDocument/2006/relationships">
-  <p:cSld>
-    <p:spTree>
-      <p:nvGrpSpPr>
-        <p:cNvPr id="1" name=""/>
-        <p:cNvGrpSpPr/>
-        <p:nvPr/>
-      </p:nvGrpSpPr>
-      <p:grpSpPr>
-        <a:xfrm>
-          <a:off x="0" y="0"/>
-          <a:ext cx="0" cy="0"/>
-          <a:chOff x="0" y="0"/>
-          <a:chExt cx="0" cy="0"/>
-        </a:xfrm>
-      </p:grpSpPr>
-      <p:sp>
-        <p:nvSpPr>
-          <p:cNvPr id="2" name="Slide Image Placeholder 1"/>
-          <p:cNvSpPr>
-            <a:spLocks noGrp="1"/>
-          </p:cNvSpPr>
-          <p:nvPr>
-            <p:ph type="sldImg" idx="2"/>
-          </p:nvPr>
-        </p:nvSpPr>
-        <p:spPr/>
-      </p:sp>
-      <p:sp>
-        <p:nvSpPr>
-          <p:cNvPr id="3" name="Notes Placeholder 2"/>
-          <p:cNvSpPr>
-            <a:spLocks noGrp="1"/>
-          </p:cNvSpPr>
-          <p:nvPr>
-            <p:ph type="body" idx="3" sz="quarter"/>
-          </p:nvPr>
-        </p:nvSpPr>
-        <p:spPr/>
-        <p:txBody>
-          <a:bodyPr/>
-          <a:lstStyle/>
-          <a:p>
-            <a:r>
-              <a:t>VO, slide 1: Sooner or later your minister asks the fair question: is this EA work actually doing anything? You need an answer that is honest, short and true — a handful of metrics, not a fifty-page report. Pick them carefully.</a:t>
-            </a:r>
-          </a:p>
-          <a:p/>
-          <a:p>
-            <a:r>
-              <a:t>RETRIEVAL MOMENT: before the four-metrics slide, ask the viewer which single number they would put in front of the budget authority. The answer — the re-use rate — is delivered two slides on.</a:t>
-            </a:r>
-          </a:p>
-        </p:txBody>
-      </p:sp>
-      <p:sp>
-        <p:nvSpPr>
-          <p:cNvPr id="4" name="Slide Number Placeholder 3"/>
-          <p:cNvSpPr>
-            <a:spLocks noGrp="1"/>
-          </p:cNvSpPr>
-          <p:nvPr>
-            <p:ph type="sldNum" idx="5" sz="quarter"/>
-          </p:nvPr>
-        </p:nvSpPr>
-        <p:spPr/>
-      </p:sp>
-    </p:spTree>
-  </p:cSld>
-  <p:clrMapOvr>
-    <a:masterClrMapping/>
-  </p:clrMapOvr>
-</p:notes>
-</file>
-
-<file path=ppt/notesSlides/notesSlide42.xml><?xml version="1.0" encoding="utf-8"?>
-<p:notes xmlns:a="http://schemas.openxmlformats.org/drawingml/2006/main" xmlns:p="http://schemas.openxmlformats.org/presentationml/2006/main" xmlns:r="http://schemas.openxmlformats.org/officeDocument/2006/relationships">
-  <p:cSld>
-    <p:spTree>
-      <p:nvGrpSpPr>
-        <p:cNvPr id="1" name=""/>
-        <p:cNvGrpSpPr/>
-        <p:nvPr/>
-      </p:nvGrpSpPr>
-      <p:grpSpPr>
-        <a:xfrm>
-          <a:off x="0" y="0"/>
-          <a:ext cx="0" cy="0"/>
-          <a:chOff x="0" y="0"/>
-          <a:chExt cx="0" cy="0"/>
-        </a:xfrm>
-      </p:grpSpPr>
-      <p:sp>
-        <p:nvSpPr>
-          <p:cNvPr id="2" name="Slide Image Placeholder 1"/>
-          <p:cNvSpPr>
-            <a:spLocks noGrp="1"/>
-          </p:cNvSpPr>
-          <p:nvPr>
-            <p:ph type="sldImg" idx="2"/>
-          </p:nvPr>
-        </p:nvSpPr>
-        <p:spPr/>
-      </p:sp>
-      <p:sp>
-        <p:nvSpPr>
-          <p:cNvPr id="3" name="Notes Placeholder 2"/>
-          <p:cNvSpPr>
-            <a:spLocks noGrp="1"/>
-          </p:cNvSpPr>
-          <p:nvPr>
-            <p:ph type="body" idx="3" sz="quarter"/>
-          </p:nvPr>
-        </p:nvSpPr>
-        <p:spPr/>
-        <p:txBody>
-          <a:bodyPr/>
-          <a:lstStyle/>
-          <a:p>
-            <a:r>
-              <a:t>VO: Four metrics carry most of the signal. Coverage — how much of your government is actually in the repository, and current, not how many pages exist. Re-use rate — of the projects that came through the gate, how many consumed a shared building block instead of building their own. This is the one that shows the EA is paying for itself. Open exceptions — how many waivers are outstanding, and how old; a growing pile of aged exceptions is fragmentation returning. And decisions — how many gate decisions the Board made, and how fast, because a slow gate is one projects route around.</a:t>
-            </a:r>
-          </a:p>
-        </p:txBody>
-      </p:sp>
-      <p:sp>
-        <p:nvSpPr>
-          <p:cNvPr id="4" name="Slide Number Placeholder 3"/>
-          <p:cNvSpPr>
-            <a:spLocks noGrp="1"/>
-          </p:cNvSpPr>
-          <p:nvPr>
-            <p:ph type="sldNum" idx="5" sz="quarter"/>
-          </p:nvPr>
-        </p:nvSpPr>
-        <p:spPr/>
-      </p:sp>
-    </p:spTree>
-  </p:cSld>
-  <p:clrMapOvr>
-    <a:masterClrMapping/>
-  </p:clrMapOvr>
-</p:notes>
-</file>
-
-<file path=ppt/notesSlides/notesSlide43.xml><?xml version="1.0" encoding="utf-8"?>
-<p:notes xmlns:a="http://schemas.openxmlformats.org/drawingml/2006/main" xmlns:p="http://schemas.openxmlformats.org/presentationml/2006/main" xmlns:r="http://schemas.openxmlformats.org/officeDocument/2006/relationships">
-  <p:cSld>
-    <p:spTree>
-      <p:nvGrpSpPr>
-        <p:cNvPr id="1" name=""/>
-        <p:cNvGrpSpPr/>
-        <p:nvPr/>
-      </p:nvGrpSpPr>
-      <p:grpSpPr>
-        <a:xfrm>
-          <a:off x="0" y="0"/>
-          <a:ext cx="0" cy="0"/>
-          <a:chOff x="0" y="0"/>
-          <a:chExt cx="0" cy="0"/>
-        </a:xfrm>
-      </p:grpSpPr>
-      <p:sp>
-        <p:nvSpPr>
-          <p:cNvPr id="2" name="Slide Image Placeholder 1"/>
-          <p:cNvSpPr>
-            <a:spLocks noGrp="1"/>
-          </p:cNvSpPr>
-          <p:nvPr>
-            <p:ph type="sldImg" idx="2"/>
-          </p:nvPr>
-        </p:nvSpPr>
-        <p:spPr/>
-      </p:sp>
-      <p:sp>
-        <p:nvSpPr>
-          <p:cNvPr id="3" name="Notes Placeholder 2"/>
-          <p:cNvSpPr>
-            <a:spLocks noGrp="1"/>
-          </p:cNvSpPr>
-          <p:nvPr>
-            <p:ph type="body" idx="3" sz="quarter"/>
-          </p:nvPr>
-        </p:nvSpPr>
-        <p:spPr/>
-        <p:txBody>
-          <a:bodyPr/>
-          <a:lstStyle/>
-          <a:p>
-            <a:r>
-              <a:t>VO: Of the four, the re-use rate is the one to put in front of the budget authority. Every project that consumed the shared identity platform instead of building its own is a system the country paid for once instead of many times. Tracked over a year, a rising re-use rate is the closest thing you have to proof that the EA is returning its cost. It turns the abstract argument — planning enables re-use — into a number that goes up. That is the metric that protects your funding.</a:t>
-            </a:r>
-          </a:p>
-          <a:p/>
-          <a:p>
-            <a:r>
-              <a:t>This answers the retrieval prompt set on the section slide.</a:t>
-            </a:r>
-          </a:p>
-        </p:txBody>
-      </p:sp>
-      <p:sp>
-        <p:nvSpPr>
-          <p:cNvPr id="4" name="Slide Number Placeholder 3"/>
-          <p:cNvSpPr>
-            <a:spLocks noGrp="1"/>
-          </p:cNvSpPr>
-          <p:nvPr>
-            <p:ph type="sldNum" idx="5" sz="quarter"/>
-          </p:nvPr>
-        </p:nvSpPr>
-        <p:spPr/>
-      </p:sp>
-    </p:spTree>
-  </p:cSld>
-  <p:clrMapOvr>
-    <a:masterClrMapping/>
-  </p:clrMapOvr>
-</p:notes>
-</file>
-
-<file path=ppt/notesSlides/notesSlide44.xml><?xml version="1.0" encoding="utf-8"?>
-<p:notes xmlns:a="http://schemas.openxmlformats.org/drawingml/2006/main" xmlns:p="http://schemas.openxmlformats.org/presentationml/2006/main" xmlns:r="http://schemas.openxmlformats.org/officeDocument/2006/relationships">
-  <p:cSld>
-    <p:spTree>
-      <p:nvGrpSpPr>
-        <p:cNvPr id="1" name=""/>
-        <p:cNvGrpSpPr/>
-        <p:nvPr/>
-      </p:nvGrpSpPr>
-      <p:grpSpPr>
-        <a:xfrm>
-          <a:off x="0" y="0"/>
-          <a:ext cx="0" cy="0"/>
-          <a:chOff x="0" y="0"/>
-          <a:chExt cx="0" cy="0"/>
-        </a:xfrm>
-      </p:grpSpPr>
-      <p:sp>
-        <p:nvSpPr>
-          <p:cNvPr id="2" name="Slide Image Placeholder 1"/>
-          <p:cNvSpPr>
-            <a:spLocks noGrp="1"/>
-          </p:cNvSpPr>
-          <p:nvPr>
-            <p:ph type="sldImg" idx="2"/>
-          </p:nvPr>
-        </p:nvSpPr>
-        <p:spPr/>
-      </p:sp>
-      <p:sp>
-        <p:nvSpPr>
-          <p:cNvPr id="3" name="Notes Placeholder 2"/>
-          <p:cNvSpPr>
-            <a:spLocks noGrp="1"/>
-          </p:cNvSpPr>
-          <p:nvPr>
-            <p:ph type="body" idx="3" sz="quarter"/>
-          </p:nvPr>
-        </p:nvSpPr>
-        <p:spPr/>
-        <p:txBody>
-          <a:bodyPr/>
-          <a:lstStyle/>
-          <a:p>
-            <a:r>
-              <a:t>VO: Avoid the vanity metrics. The number of diagrams drawn, pages written, meetings held — these measure activity, not effect. A programme can produce a thousand pages and change nothing. Worse, busy-looking metrics let a stalled EA hide. If a metric would still go up while the architecture quietly stopped mattering, it is the wrong metric. Measure what the EA changes — re-use, coverage, decisions — not how busy the team looks.</a:t>
-            </a:r>
-          </a:p>
-        </p:txBody>
-      </p:sp>
-      <p:sp>
-        <p:nvSpPr>
-          <p:cNvPr id="4" name="Slide Number Placeholder 3"/>
-          <p:cNvSpPr>
-            <a:spLocks noGrp="1"/>
-          </p:cNvSpPr>
-          <p:nvPr>
-            <p:ph type="sldNum" idx="5" sz="quarter"/>
-          </p:nvPr>
-        </p:nvSpPr>
-        <p:spPr/>
-      </p:sp>
-    </p:spTree>
-  </p:cSld>
-  <p:clrMapOvr>
-    <a:masterClrMapping/>
-  </p:clrMapOvr>
-</p:notes>
-</file>
-
-<file path=ppt/notesSlides/notesSlide45.xml><?xml version="1.0" encoding="utf-8"?>
-<p:notes xmlns:a="http://schemas.openxmlformats.org/drawingml/2006/main" xmlns:p="http://schemas.openxmlformats.org/presentationml/2006/main" xmlns:r="http://schemas.openxmlformats.org/officeDocument/2006/relationships">
-  <p:cSld>
-    <p:spTree>
-      <p:nvGrpSpPr>
-        <p:cNvPr id="1" name=""/>
-        <p:cNvGrpSpPr/>
-        <p:nvPr/>
-      </p:nvGrpSpPr>
-      <p:grpSpPr>
-        <a:xfrm>
-          <a:off x="0" y="0"/>
-          <a:ext cx="0" cy="0"/>
-          <a:chOff x="0" y="0"/>
-          <a:chExt cx="0" cy="0"/>
-        </a:xfrm>
-      </p:grpSpPr>
-      <p:sp>
-        <p:nvSpPr>
-          <p:cNvPr id="2" name="Slide Image Placeholder 1"/>
-          <p:cNvSpPr>
-            <a:spLocks noGrp="1"/>
-          </p:cNvSpPr>
-          <p:nvPr>
-            <p:ph type="sldImg" idx="2"/>
-          </p:nvPr>
-        </p:nvSpPr>
-        <p:spPr/>
-      </p:sp>
-      <p:sp>
-        <p:nvSpPr>
-          <p:cNvPr id="3" name="Notes Placeholder 2"/>
-          <p:cNvSpPr>
-            <a:spLocks noGrp="1"/>
-          </p:cNvSpPr>
-          <p:nvPr>
-            <p:ph type="body" idx="3" sz="quarter"/>
-          </p:nvPr>
-        </p:nvSpPr>
-        <p:spPr/>
-        <p:txBody>
-          <a:bodyPr/>
-          <a:lstStyle/>
-          <a:p>
-            <a:r>
-              <a:t>VO: Report the four on a single page, every quarter, to the Board and the minister. Include what is not working — the coverage gap in a sector nobody will let you near, the aging exceptions a powerful ministry will not close. The temptation is to show only green. Resist it. A scorecard that is honestly amber where it should be is what builds the trust that keeps the EA funded across a change of minister. A scorecard that is always green is one nobody believes the second time.</a:t>
-            </a:r>
-          </a:p>
-        </p:txBody>
-      </p:sp>
-      <p:sp>
-        <p:nvSpPr>
-          <p:cNvPr id="4" name="Slide Number Placeholder 3"/>
-          <p:cNvSpPr>
-            <a:spLocks noGrp="1"/>
-          </p:cNvSpPr>
-          <p:nvPr>
-            <p:ph type="sldNum" idx="5" sz="quarter"/>
-          </p:nvPr>
-        </p:nvSpPr>
-        <p:spPr/>
-      </p:sp>
-    </p:spTree>
-  </p:cSld>
-  <p:clrMapOvr>
-    <a:masterClrMapping/>
-  </p:clrMapOvr>
-</p:notes>
-</file>
-
 <file path=ppt/notesSlides/notesSlide46.xml><?xml version="1.0" encoding="utf-8"?>
 <p:notes xmlns:a="http://schemas.openxmlformats.org/drawingml/2006/main" xmlns:p="http://schemas.openxmlformats.org/presentationml/2006/main" xmlns:r="http://schemas.openxmlformats.org/officeDocument/2006/relationships">
   <p:cSld>
@@ -1365,13 +933,7 @@
           <a:lstStyle/>
           <a:p>
             <a:r>
-              <a:t>PRACTICE BOX (on-screen only — never read it, never paraphrase it, never point at it). It replaces the narrated handoff: this video ends on the recap and the Sources slide.</a:t>
-            </a:r>
-          </a:p>
-          <a:p/>
-          <a:p>
-            <a:r>
-              <a:t>VO: So measure a few things, honestly. Coverage. Re-use rate. Open exceptions. Decisions made and how fast. On one page, every quarter, amber where they should be amber.</a:t>
+              <a:t>Title card — the cold open. The hosts name the module, the video number, the title and the single message on this slide; no scripted narration. Hold until the opener begins; the opener is narrated on the next slide.</a:t>
             </a:r>
           </a:p>
         </p:txBody>
@@ -1397,6 +959,444 @@
 </file>
 
 <file path=ppt/notesSlides/notesSlide47.xml><?xml version="1.0" encoding="utf-8"?>
+<p:notes xmlns:a="http://schemas.openxmlformats.org/drawingml/2006/main" xmlns:p="http://schemas.openxmlformats.org/presentationml/2006/main" xmlns:r="http://schemas.openxmlformats.org/officeDocument/2006/relationships">
+  <p:cSld>
+    <p:spTree>
+      <p:nvGrpSpPr>
+        <p:cNvPr id="1" name=""/>
+        <p:cNvGrpSpPr/>
+        <p:nvPr/>
+      </p:nvGrpSpPr>
+      <p:grpSpPr>
+        <a:xfrm>
+          <a:off x="0" y="0"/>
+          <a:ext cx="0" cy="0"/>
+          <a:chOff x="0" y="0"/>
+          <a:chExt cx="0" cy="0"/>
+        </a:xfrm>
+      </p:grpSpPr>
+      <p:sp>
+        <p:nvSpPr>
+          <p:cNvPr id="2" name="Slide Image Placeholder 1"/>
+          <p:cNvSpPr>
+            <a:spLocks noGrp="1"/>
+          </p:cNvSpPr>
+          <p:nvPr>
+            <p:ph type="sldImg" idx="2"/>
+          </p:nvPr>
+        </p:nvSpPr>
+        <p:spPr/>
+      </p:sp>
+      <p:sp>
+        <p:nvSpPr>
+          <p:cNvPr id="3" name="Notes Placeholder 2"/>
+          <p:cNvSpPr>
+            <a:spLocks noGrp="1"/>
+          </p:cNvSpPr>
+          <p:nvPr>
+            <p:ph type="body" idx="3" sz="quarter"/>
+          </p:nvPr>
+        </p:nvSpPr>
+        <p:spPr/>
+        <p:txBody>
+          <a:bodyPr/>
+          <a:lstStyle/>
+          <a:p>
+            <a:r>
+              <a:t>VO: Sooner or later your minister asks the fair question: is this EA work actually doing anything? You need an answer that is honest, short and true — a handful of metrics, not a fifty-page report. Pick them carefully.</a:t>
+            </a:r>
+          </a:p>
+          <a:p/>
+          <a:p>
+            <a:r>
+              <a:t>RETRIEVAL MOMENT: before the four-metrics slide, ask the viewer which single number they would put in front of the budget authority. The answer — the re-use rate — is delivered two slides on.</a:t>
+            </a:r>
+          </a:p>
+        </p:txBody>
+      </p:sp>
+      <p:sp>
+        <p:nvSpPr>
+          <p:cNvPr id="4" name="Slide Number Placeholder 3"/>
+          <p:cNvSpPr>
+            <a:spLocks noGrp="1"/>
+          </p:cNvSpPr>
+          <p:nvPr>
+            <p:ph type="sldNum" idx="5" sz="quarter"/>
+          </p:nvPr>
+        </p:nvSpPr>
+        <p:spPr/>
+      </p:sp>
+    </p:spTree>
+  </p:cSld>
+  <p:clrMapOvr>
+    <a:masterClrMapping/>
+  </p:clrMapOvr>
+</p:notes>
+</file>
+
+<file path=ppt/notesSlides/notesSlide48.xml><?xml version="1.0" encoding="utf-8"?>
+<p:notes xmlns:a="http://schemas.openxmlformats.org/drawingml/2006/main" xmlns:p="http://schemas.openxmlformats.org/presentationml/2006/main" xmlns:r="http://schemas.openxmlformats.org/officeDocument/2006/relationships">
+  <p:cSld>
+    <p:spTree>
+      <p:nvGrpSpPr>
+        <p:cNvPr id="1" name=""/>
+        <p:cNvGrpSpPr/>
+        <p:nvPr/>
+      </p:nvGrpSpPr>
+      <p:grpSpPr>
+        <a:xfrm>
+          <a:off x="0" y="0"/>
+          <a:ext cx="0" cy="0"/>
+          <a:chOff x="0" y="0"/>
+          <a:chExt cx="0" cy="0"/>
+        </a:xfrm>
+      </p:grpSpPr>
+      <p:sp>
+        <p:nvSpPr>
+          <p:cNvPr id="2" name="Slide Image Placeholder 1"/>
+          <p:cNvSpPr>
+            <a:spLocks noGrp="1"/>
+          </p:cNvSpPr>
+          <p:nvPr>
+            <p:ph type="sldImg" idx="2"/>
+          </p:nvPr>
+        </p:nvSpPr>
+        <p:spPr/>
+      </p:sp>
+      <p:sp>
+        <p:nvSpPr>
+          <p:cNvPr id="3" name="Notes Placeholder 2"/>
+          <p:cNvSpPr>
+            <a:spLocks noGrp="1"/>
+          </p:cNvSpPr>
+          <p:nvPr>
+            <p:ph type="body" idx="3" sz="quarter"/>
+          </p:nvPr>
+        </p:nvSpPr>
+        <p:spPr/>
+        <p:txBody>
+          <a:bodyPr/>
+          <a:lstStyle/>
+          <a:p>
+            <a:r>
+              <a:t>VO: Four metrics carry most of the signal. Coverage — how much of your government is actually in the repository, and current, not how many pages exist. Re-use rate — of the projects that came through the gate, how many consumed a shared building block instead of building their own. This is the one that shows the EA is paying for itself. Open exceptions — how many waivers are outstanding, and how old; a growing pile of aged exceptions is fragmentation returning. And decisions — how many gate decisions the Board made, and how fast, because a slow gate is one projects route around.</a:t>
+            </a:r>
+          </a:p>
+        </p:txBody>
+      </p:sp>
+      <p:sp>
+        <p:nvSpPr>
+          <p:cNvPr id="4" name="Slide Number Placeholder 3"/>
+          <p:cNvSpPr>
+            <a:spLocks noGrp="1"/>
+          </p:cNvSpPr>
+          <p:nvPr>
+            <p:ph type="sldNum" idx="5" sz="quarter"/>
+          </p:nvPr>
+        </p:nvSpPr>
+        <p:spPr/>
+      </p:sp>
+    </p:spTree>
+  </p:cSld>
+  <p:clrMapOvr>
+    <a:masterClrMapping/>
+  </p:clrMapOvr>
+</p:notes>
+</file>
+
+<file path=ppt/notesSlides/notesSlide49.xml><?xml version="1.0" encoding="utf-8"?>
+<p:notes xmlns:a="http://schemas.openxmlformats.org/drawingml/2006/main" xmlns:p="http://schemas.openxmlformats.org/presentationml/2006/main" xmlns:r="http://schemas.openxmlformats.org/officeDocument/2006/relationships">
+  <p:cSld>
+    <p:spTree>
+      <p:nvGrpSpPr>
+        <p:cNvPr id="1" name=""/>
+        <p:cNvGrpSpPr/>
+        <p:nvPr/>
+      </p:nvGrpSpPr>
+      <p:grpSpPr>
+        <a:xfrm>
+          <a:off x="0" y="0"/>
+          <a:ext cx="0" cy="0"/>
+          <a:chOff x="0" y="0"/>
+          <a:chExt cx="0" cy="0"/>
+        </a:xfrm>
+      </p:grpSpPr>
+      <p:sp>
+        <p:nvSpPr>
+          <p:cNvPr id="2" name="Slide Image Placeholder 1"/>
+          <p:cNvSpPr>
+            <a:spLocks noGrp="1"/>
+          </p:cNvSpPr>
+          <p:nvPr>
+            <p:ph type="sldImg" idx="2"/>
+          </p:nvPr>
+        </p:nvSpPr>
+        <p:spPr/>
+      </p:sp>
+      <p:sp>
+        <p:nvSpPr>
+          <p:cNvPr id="3" name="Notes Placeholder 2"/>
+          <p:cNvSpPr>
+            <a:spLocks noGrp="1"/>
+          </p:cNvSpPr>
+          <p:nvPr>
+            <p:ph type="body" idx="3" sz="quarter"/>
+          </p:nvPr>
+        </p:nvSpPr>
+        <p:spPr/>
+        <p:txBody>
+          <a:bodyPr/>
+          <a:lstStyle/>
+          <a:p>
+            <a:r>
+              <a:t>VO: Of the four, the re-use rate is the one to put in front of the budget authority. Every project that consumed the shared identity platform instead of building its own is a system the country paid for once instead of many times. Tracked over a year, a rising re-use rate is the closest thing you have to proof that the EA is returning its cost. It turns the abstract argument — planning enables re-use — into a number that goes up. That is the metric that protects your funding.</a:t>
+            </a:r>
+          </a:p>
+          <a:p/>
+          <a:p>
+            <a:r>
+              <a:t>This answers the retrieval prompt set on the section slide.</a:t>
+            </a:r>
+          </a:p>
+        </p:txBody>
+      </p:sp>
+      <p:sp>
+        <p:nvSpPr>
+          <p:cNvPr id="4" name="Slide Number Placeholder 3"/>
+          <p:cNvSpPr>
+            <a:spLocks noGrp="1"/>
+          </p:cNvSpPr>
+          <p:nvPr>
+            <p:ph type="sldNum" idx="5" sz="quarter"/>
+          </p:nvPr>
+        </p:nvSpPr>
+        <p:spPr/>
+      </p:sp>
+    </p:spTree>
+  </p:cSld>
+  <p:clrMapOvr>
+    <a:masterClrMapping/>
+  </p:clrMapOvr>
+</p:notes>
+</file>
+
+<file path=ppt/notesSlides/notesSlide50.xml><?xml version="1.0" encoding="utf-8"?>
+<p:notes xmlns:a="http://schemas.openxmlformats.org/drawingml/2006/main" xmlns:p="http://schemas.openxmlformats.org/presentationml/2006/main" xmlns:r="http://schemas.openxmlformats.org/officeDocument/2006/relationships">
+  <p:cSld>
+    <p:spTree>
+      <p:nvGrpSpPr>
+        <p:cNvPr id="1" name=""/>
+        <p:cNvGrpSpPr/>
+        <p:nvPr/>
+      </p:nvGrpSpPr>
+      <p:grpSpPr>
+        <a:xfrm>
+          <a:off x="0" y="0"/>
+          <a:ext cx="0" cy="0"/>
+          <a:chOff x="0" y="0"/>
+          <a:chExt cx="0" cy="0"/>
+        </a:xfrm>
+      </p:grpSpPr>
+      <p:sp>
+        <p:nvSpPr>
+          <p:cNvPr id="2" name="Slide Image Placeholder 1"/>
+          <p:cNvSpPr>
+            <a:spLocks noGrp="1"/>
+          </p:cNvSpPr>
+          <p:nvPr>
+            <p:ph type="sldImg" idx="2"/>
+          </p:nvPr>
+        </p:nvSpPr>
+        <p:spPr/>
+      </p:sp>
+      <p:sp>
+        <p:nvSpPr>
+          <p:cNvPr id="3" name="Notes Placeholder 2"/>
+          <p:cNvSpPr>
+            <a:spLocks noGrp="1"/>
+          </p:cNvSpPr>
+          <p:nvPr>
+            <p:ph type="body" idx="3" sz="quarter"/>
+          </p:nvPr>
+        </p:nvSpPr>
+        <p:spPr/>
+        <p:txBody>
+          <a:bodyPr/>
+          <a:lstStyle/>
+          <a:p>
+            <a:r>
+              <a:t>VO: Avoid the vanity metrics. The number of diagrams drawn, pages written, meetings held — these measure activity, not effect. A programme can produce a thousand pages and change nothing. Worse, busy-looking metrics let a stalled EA hide. If a metric would still go up while the architecture quietly stopped mattering, it is the wrong metric. Measure what the EA changes — re-use, coverage, decisions — not how busy the team looks.</a:t>
+            </a:r>
+          </a:p>
+        </p:txBody>
+      </p:sp>
+      <p:sp>
+        <p:nvSpPr>
+          <p:cNvPr id="4" name="Slide Number Placeholder 3"/>
+          <p:cNvSpPr>
+            <a:spLocks noGrp="1"/>
+          </p:cNvSpPr>
+          <p:nvPr>
+            <p:ph type="sldNum" idx="5" sz="quarter"/>
+          </p:nvPr>
+        </p:nvSpPr>
+        <p:spPr/>
+      </p:sp>
+    </p:spTree>
+  </p:cSld>
+  <p:clrMapOvr>
+    <a:masterClrMapping/>
+  </p:clrMapOvr>
+</p:notes>
+</file>
+
+<file path=ppt/notesSlides/notesSlide51.xml><?xml version="1.0" encoding="utf-8"?>
+<p:notes xmlns:a="http://schemas.openxmlformats.org/drawingml/2006/main" xmlns:p="http://schemas.openxmlformats.org/presentationml/2006/main" xmlns:r="http://schemas.openxmlformats.org/officeDocument/2006/relationships">
+  <p:cSld>
+    <p:spTree>
+      <p:nvGrpSpPr>
+        <p:cNvPr id="1" name=""/>
+        <p:cNvGrpSpPr/>
+        <p:nvPr/>
+      </p:nvGrpSpPr>
+      <p:grpSpPr>
+        <a:xfrm>
+          <a:off x="0" y="0"/>
+          <a:ext cx="0" cy="0"/>
+          <a:chOff x="0" y="0"/>
+          <a:chExt cx="0" cy="0"/>
+        </a:xfrm>
+      </p:grpSpPr>
+      <p:sp>
+        <p:nvSpPr>
+          <p:cNvPr id="2" name="Slide Image Placeholder 1"/>
+          <p:cNvSpPr>
+            <a:spLocks noGrp="1"/>
+          </p:cNvSpPr>
+          <p:nvPr>
+            <p:ph type="sldImg" idx="2"/>
+          </p:nvPr>
+        </p:nvSpPr>
+        <p:spPr/>
+      </p:sp>
+      <p:sp>
+        <p:nvSpPr>
+          <p:cNvPr id="3" name="Notes Placeholder 2"/>
+          <p:cNvSpPr>
+            <a:spLocks noGrp="1"/>
+          </p:cNvSpPr>
+          <p:nvPr>
+            <p:ph type="body" idx="3" sz="quarter"/>
+          </p:nvPr>
+        </p:nvSpPr>
+        <p:spPr/>
+        <p:txBody>
+          <a:bodyPr/>
+          <a:lstStyle/>
+          <a:p>
+            <a:r>
+              <a:t>VO: Report the four on a single page, every quarter, to the Board and the minister. Include what is not working — the coverage gap in a sector nobody will let you near, the aging exceptions a powerful ministry will not close. The temptation is to show only green. Resist it. A scorecard that is honestly amber where it should be is what builds the trust that keeps the EA funded across a change of minister. A scorecard that is always green is one nobody believes the second time.</a:t>
+            </a:r>
+          </a:p>
+        </p:txBody>
+      </p:sp>
+      <p:sp>
+        <p:nvSpPr>
+          <p:cNvPr id="4" name="Slide Number Placeholder 3"/>
+          <p:cNvSpPr>
+            <a:spLocks noGrp="1"/>
+          </p:cNvSpPr>
+          <p:nvPr>
+            <p:ph type="sldNum" idx="5" sz="quarter"/>
+          </p:nvPr>
+        </p:nvSpPr>
+        <p:spPr/>
+      </p:sp>
+    </p:spTree>
+  </p:cSld>
+  <p:clrMapOvr>
+    <a:masterClrMapping/>
+  </p:clrMapOvr>
+</p:notes>
+</file>
+
+<file path=ppt/notesSlides/notesSlide52.xml><?xml version="1.0" encoding="utf-8"?>
+<p:notes xmlns:a="http://schemas.openxmlformats.org/drawingml/2006/main" xmlns:p="http://schemas.openxmlformats.org/presentationml/2006/main" xmlns:r="http://schemas.openxmlformats.org/officeDocument/2006/relationships">
+  <p:cSld>
+    <p:spTree>
+      <p:nvGrpSpPr>
+        <p:cNvPr id="1" name=""/>
+        <p:cNvGrpSpPr/>
+        <p:nvPr/>
+      </p:nvGrpSpPr>
+      <p:grpSpPr>
+        <a:xfrm>
+          <a:off x="0" y="0"/>
+          <a:ext cx="0" cy="0"/>
+          <a:chOff x="0" y="0"/>
+          <a:chExt cx="0" cy="0"/>
+        </a:xfrm>
+      </p:grpSpPr>
+      <p:sp>
+        <p:nvSpPr>
+          <p:cNvPr id="2" name="Slide Image Placeholder 1"/>
+          <p:cNvSpPr>
+            <a:spLocks noGrp="1"/>
+          </p:cNvSpPr>
+          <p:nvPr>
+            <p:ph type="sldImg" idx="2"/>
+          </p:nvPr>
+        </p:nvSpPr>
+        <p:spPr/>
+      </p:sp>
+      <p:sp>
+        <p:nvSpPr>
+          <p:cNvPr id="3" name="Notes Placeholder 2"/>
+          <p:cNvSpPr>
+            <a:spLocks noGrp="1"/>
+          </p:cNvSpPr>
+          <p:nvPr>
+            <p:ph type="body" idx="3" sz="quarter"/>
+          </p:nvPr>
+        </p:nvSpPr>
+        <p:spPr/>
+        <p:txBody>
+          <a:bodyPr/>
+          <a:lstStyle/>
+          <a:p>
+            <a:r>
+              <a:t>PRACTICE BOX (on-screen only — never read it, never paraphrase it, never point at it). It replaces the narrated handoff: this video ends on the recap and the Sources slide.</a:t>
+            </a:r>
+          </a:p>
+          <a:p/>
+          <a:p>
+            <a:r>
+              <a:t>VO: So measure a few things, honestly. Coverage. Re-use rate. Open exceptions. Decisions made and how fast. On one page, every quarter, amber where they should be amber.</a:t>
+            </a:r>
+          </a:p>
+        </p:txBody>
+      </p:sp>
+      <p:sp>
+        <p:nvSpPr>
+          <p:cNvPr id="4" name="Slide Number Placeholder 3"/>
+          <p:cNvSpPr>
+            <a:spLocks noGrp="1"/>
+          </p:cNvSpPr>
+          <p:nvPr>
+            <p:ph type="sldNum" idx="5" sz="quarter"/>
+          </p:nvPr>
+        </p:nvSpPr>
+        <p:spPr/>
+      </p:sp>
+    </p:spTree>
+  </p:cSld>
+  <p:clrMapOvr>
+    <a:masterClrMapping/>
+  </p:clrMapOvr>
+</p:notes>
+</file>
+
+<file path=ppt/notesSlides/notesSlide53.xml><?xml version="1.0" encoding="utf-8"?>
 <p:notes xmlns:a="http://schemas.openxmlformats.org/drawingml/2006/main" xmlns:p="http://schemas.openxmlformats.org/presentationml/2006/main" xmlns:r="http://schemas.openxmlformats.org/officeDocument/2006/relationships">
   <p:cSld>
     <p:spTree>
@@ -11602,8 +11602,8 @@
 </p:sldMaster>
 </file>
 
-<file path=ppt/slides/slide1.xml><?xml version="1.0" encoding="utf-8"?>
-<p:sld xmlns:a="http://schemas.openxmlformats.org/drawingml/2006/main" xmlns:r="http://schemas.openxmlformats.org/officeDocument/2006/relationships" xmlns:p="http://schemas.openxmlformats.org/presentationml/2006/main">
+<file path=ppt/slides/slide46.xml><?xml version="1.0" encoding="utf-8"?>
+<p:sld xmlns:a="http://schemas.openxmlformats.org/drawingml/2006/main" xmlns:p="http://schemas.openxmlformats.org/presentationml/2006/main" xmlns:r="http://schemas.openxmlformats.org/officeDocument/2006/relationships">
   <p:cSld>
     <p:spTree>
       <p:nvGrpSpPr>
@@ -11611,319 +11611,415 @@
         <p:cNvGrpSpPr/>
         <p:nvPr/>
       </p:nvGrpSpPr>
-      <p:grpSpPr>
-        <a:xfrm>
-          <a:off x="0" y="0"/>
-          <a:ext cx="0" cy="0"/>
-          <a:chOff x="0" y="0"/>
-          <a:chExt cx="0" cy="0"/>
-        </a:xfrm>
-      </p:grpSpPr>
-      <p:cxnSp>
-        <p:nvCxnSpPr>
-          <p:cNvPr id="11" name="Straight Connector 10">
-            <a:extLst>
-              <a:ext uri="{FF2B5EF4-FFF2-40B4-BE49-F238E27FC236}">
-                <a16:creationId xmlns:a16="http://schemas.microsoft.com/office/drawing/2014/main" id="{D9AD66F2-F7C0-4D03-9150-D28F17AC561D}"/>
-              </a:ext>
-            </a:extLst>
-          </p:cNvPr>
-          <p:cNvCxnSpPr>
-            <a:cxnSpLocks/>
-          </p:cNvCxnSpPr>
+      <p:grpSpPr/>
+      <p:sp>
+        <p:nvSpPr>
+          <p:cNvPr id="2" name="TextBox 1"/>
+          <p:cNvSpPr txBox="1"/>
           <p:nvPr/>
-        </p:nvCxnSpPr>
-        <p:spPr>
-          <a:xfrm>
-            <a:off x="373021" y="2198718"/>
-            <a:ext cx="6843567" cy="0"/>
-          </a:xfrm>
-          <a:prstGeom prst="line">
-            <a:avLst/>
-          </a:prstGeom>
-          <a:ln w="12700">
-            <a:solidFill>
-              <a:srgbClr val="009CD6"/>
-            </a:solidFill>
-          </a:ln>
-        </p:spPr>
-        <p:style>
-          <a:lnRef idx="1">
-            <a:schemeClr val="accent1"/>
-          </a:lnRef>
-          <a:fillRef idx="0">
-            <a:schemeClr val="accent1"/>
-          </a:fillRef>
-          <a:effectRef idx="0">
-            <a:schemeClr val="accent1"/>
-          </a:effectRef>
-          <a:fontRef idx="minor">
-            <a:schemeClr val="tx1"/>
-          </a:fontRef>
-        </p:style>
-      </p:cxnSp>
-      <p:sp>
-        <p:nvSpPr>
-          <p:cNvPr id="12" name="Title 9">
-            <a:extLst>
-              <a:ext uri="{FF2B5EF4-FFF2-40B4-BE49-F238E27FC236}">
-                <a16:creationId xmlns:a16="http://schemas.microsoft.com/office/drawing/2014/main" id="{EEB08032-CE0E-4986-AEDF-A41026C0E8B9}"/>
-              </a:ext>
-            </a:extLst>
-          </p:cNvPr>
-          <p:cNvSpPr txBox="1">
-            <a:spLocks/>
-          </p:cNvSpPr>
-          <p:nvPr/>
-        </p:nvSpPr>
-        <p:spPr>
-          <a:xfrm>
-            <a:off x="237734" y="702833"/>
-            <a:ext cx="6432007" cy="1218817"/>
+        </p:nvSpPr>
+        <p:spPr>
+          <a:xfrm>
+            <a:off x="822960" y="822960"/>
+            <a:ext cx="7315200" cy="457200"/>
           </a:xfrm>
           <a:prstGeom prst="rect">
             <a:avLst/>
           </a:prstGeom>
-        </p:spPr>
-        <p:txBody>
-          <a:bodyPr anchor="b">
-            <a:noAutofit/>
+          <a:noFill/>
+        </p:spPr>
+        <p:txBody>
+          <a:bodyPr wrap="square">
+            <a:spAutoFit/>
           </a:bodyPr>
-          <a:lstStyle>
-            <a:lvl1pPr algn="l" defTabSz="914400" rtl="0" eaLnBrk="1" latinLnBrk="0" hangingPunct="1">
-              <a:lnSpc>
-                <a:spcPct val="90000"/>
-              </a:lnSpc>
-              <a:spcBef>
-                <a:spcPct val="0"/>
-              </a:spcBef>
-              <a:buNone/>
-              <a:defRPr sz="4000" kern="1200">
+          <a:lstStyle/>
+          <a:p>
+            <a:r>
+              <a:rPr sz="1200" b="1" i="0">
                 <a:solidFill>
-                  <a:schemeClr val="bg1"/>
+                  <a:srgbClr val="595959"/>
                 </a:solidFill>
-                <a:latin typeface="Arial" panose="020B0604020202020204" pitchFamily="34" charset="0"/>
-                <a:ea typeface="+mj-ea"/>
-                <a:cs typeface="Arial" panose="020B0604020202020204" pitchFamily="34" charset="0"/>
-              </a:defRPr>
-            </a:lvl1pPr>
-          </a:lstStyle>
-          <a:p>
-            <a:r>
-              <a:rPr sz="2400" b="1" i="0">
+                <a:latin typeface="Arial"/>
+              </a:rPr>
+              <a:t>KP1 · MODULE 3 · VIDEO 3.6</a:t>
+            </a:r>
+          </a:p>
+        </p:txBody>
+      </p:sp>
+      <p:sp>
+        <p:nvSpPr>
+          <p:cNvPr id="3" name="TextBox 2"/>
+          <p:cNvSpPr txBox="1"/>
+          <p:nvPr/>
+        </p:nvSpPr>
+        <p:spPr>
+          <a:xfrm>
+            <a:off x="822960" y="1828800"/>
+            <a:ext cx="2011680" cy="1097280"/>
+          </a:xfrm>
+          <a:prstGeom prst="rect">
+            <a:avLst/>
+          </a:prstGeom>
+          <a:noFill/>
+        </p:spPr>
+        <p:txBody>
+          <a:bodyPr wrap="square">
+            <a:spAutoFit/>
+          </a:bodyPr>
+          <a:lstStyle/>
+          <a:p>
+            <a:r>
+              <a:rPr sz="6000" b="1" i="0">
+                <a:solidFill>
+                  <a:srgbClr val="009CD6"/>
+                </a:solidFill>
+                <a:latin typeface="Arial"/>
+              </a:rPr>
+              <a:t>3.6</a:t>
+            </a:r>
+          </a:p>
+        </p:txBody>
+      </p:sp>
+      <p:sp>
+        <p:nvSpPr>
+          <p:cNvPr id="4" name="TextBox 3"/>
+          <p:cNvSpPr txBox="1"/>
+          <p:nvPr/>
+        </p:nvSpPr>
+        <p:spPr>
+          <a:xfrm>
+            <a:off x="822960" y="2880360"/>
+            <a:ext cx="9601200" cy="1371600"/>
+          </a:xfrm>
+          <a:prstGeom prst="rect">
+            <a:avLst/>
+          </a:prstGeom>
+          <a:noFill/>
+        </p:spPr>
+        <p:txBody>
+          <a:bodyPr wrap="square">
+            <a:spAutoFit/>
+          </a:bodyPr>
+          <a:lstStyle/>
+          <a:p>
+            <a:r>
+              <a:rPr sz="3400" b="1" i="0">
                 <a:solidFill>
                   <a:srgbClr val="1A1A1A"/>
                 </a:solidFill>
                 <a:latin typeface="Arial"/>
               </a:rPr>
-              <a:t>3.6 — Show the EA is working — the few metrics that matter</a:t>
-            </a:r>
-          </a:p>
-        </p:txBody>
-      </p:sp>
-      <p:pic>
-        <p:nvPicPr>
-          <p:cNvPr id="7" name="Picture 6">
-            <a:extLst>
-              <a:ext uri="{FF2B5EF4-FFF2-40B4-BE49-F238E27FC236}">
-                <a16:creationId xmlns:a16="http://schemas.microsoft.com/office/drawing/2014/main" id="{A2066351-C569-4C4C-A096-308777FCDC32}"/>
-              </a:ext>
-            </a:extLst>
-          </p:cNvPr>
-          <p:cNvPicPr>
-            <a:picLocks noChangeAspect="1"/>
-          </p:cNvPicPr>
+              <a:t>Show the EA is working — the few metrics that matter</a:t>
+            </a:r>
+          </a:p>
+        </p:txBody>
+      </p:sp>
+      <p:sp>
+        <p:nvSpPr>
+          <p:cNvPr id="5" name="TextBox 4"/>
+          <p:cNvSpPr txBox="1"/>
           <p:nvPr/>
-        </p:nvPicPr>
-        <p:blipFill>
-          <a:blip r:embed="rId2">
-            <a:extLst>
-              <a:ext uri="{28A0092B-C50C-407E-A947-70E740481C1C}">
-                <a14:useLocalDpi xmlns:a14="http://schemas.microsoft.com/office/drawing/2010/main" val="0"/>
-              </a:ext>
-            </a:extLst>
-          </a:blip>
-          <a:srcRect t="20219" b="14729"/>
-          <a:stretch>
-            <a:fillRect/>
-          </a:stretch>
-        </p:blipFill>
-        <p:spPr>
-          <a:xfrm>
-            <a:off x="0" y="5620871"/>
-            <a:ext cx="1323975" cy="1218816"/>
+        </p:nvSpPr>
+        <p:spPr>
+          <a:xfrm>
+            <a:off x="822960" y="4343400"/>
+            <a:ext cx="9875520" cy="1554480"/>
           </a:xfrm>
           <a:prstGeom prst="rect">
             <a:avLst/>
           </a:prstGeom>
-        </p:spPr>
-      </p:pic>
-      <p:sp>
-        <p:nvSpPr>
-          <p:cNvPr id="14" name="Title 9">
-            <a:extLst>
-              <a:ext uri="{FF2B5EF4-FFF2-40B4-BE49-F238E27FC236}">
-                <a16:creationId xmlns:a16="http://schemas.microsoft.com/office/drawing/2014/main" id="{B5087B80-3EE4-1881-0130-ED58CA625092}"/>
-              </a:ext>
-            </a:extLst>
-          </p:cNvPr>
-          <p:cNvSpPr txBox="1">
-            <a:spLocks/>
-          </p:cNvSpPr>
+          <a:noFill/>
+        </p:spPr>
+        <p:txBody>
+          <a:bodyPr wrap="square">
+            <a:spAutoFit/>
+          </a:bodyPr>
+          <a:lstStyle/>
+          <a:p>
+            <a:r>
+              <a:rPr sz="1700" b="0" i="1">
+                <a:solidFill>
+                  <a:srgbClr val="595959"/>
+                </a:solidFill>
+                <a:latin typeface="Arial"/>
+              </a:rPr>
+              <a:t>A handful of honest metrics — coverage, re-use rate, open exceptions, decisions made — show the minister and the team that the EA is working, and tell you where it isn’t, without drowning anyone in vanity numbers.</a:t>
+            </a:r>
+          </a:p>
+        </p:txBody>
+      </p:sp>
+      <p:sp>
+        <p:nvSpPr>
+          <p:cNvPr id="6" name="TextBox 5"/>
+          <p:cNvSpPr txBox="1"/>
           <p:nvPr/>
         </p:nvSpPr>
         <p:spPr>
           <a:xfrm>
-            <a:off x="284452" y="2475786"/>
-            <a:ext cx="6382893" cy="953213"/>
+            <a:off x="822960" y="5989320"/>
+            <a:ext cx="7315200" cy="365760"/>
           </a:xfrm>
           <a:prstGeom prst="rect">
             <a:avLst/>
           </a:prstGeom>
-        </p:spPr>
-        <p:txBody>
-          <a:bodyPr anchor="t">
-            <a:noAutofit/>
+          <a:noFill/>
+        </p:spPr>
+        <p:txBody>
+          <a:bodyPr wrap="square">
+            <a:spAutoFit/>
           </a:bodyPr>
-          <a:lstStyle>
-            <a:lvl1pPr algn="l" defTabSz="914400" rtl="0" eaLnBrk="1" latinLnBrk="0" hangingPunct="1">
-              <a:lnSpc>
-                <a:spcPct val="90000"/>
-              </a:lnSpc>
-              <a:spcBef>
-                <a:spcPct val="0"/>
-              </a:spcBef>
-              <a:buNone/>
-              <a:defRPr sz="4000" kern="1200">
+          <a:lstStyle/>
+          <a:p>
+            <a:r>
+              <a:rPr sz="1200" b="0" i="0">
                 <a:solidFill>
-                  <a:schemeClr val="bg1"/>
+                  <a:srgbClr val="595959"/>
                 </a:solidFill>
-                <a:latin typeface="Arial" panose="020B0604020202020204" pitchFamily="34" charset="0"/>
-                <a:ea typeface="+mj-ea"/>
-                <a:cs typeface="Arial" panose="020B0604020202020204" pitchFamily="34" charset="0"/>
-              </a:defRPr>
-            </a:lvl1pPr>
-          </a:lstStyle>
-          <a:p>
-            <a:pPr marL="0" marR="0" lvl="0" indent="0" rtl="0">
-              <a:spcBef>
-                <a:spcPts val="600"/>
-              </a:spcBef>
-              <a:spcAft>
-                <a:spcPts val="0"/>
-              </a:spcAft>
-              <a:buNone/>
-            </a:pPr>
-            <a:r>
-              <a:rPr sz="1300" b="1" i="0">
+                <a:latin typeface="Arial"/>
+              </a:rPr>
+              <a:t>~4 minutes · standalone video · voice-over on text slides</a:t>
+            </a:r>
+          </a:p>
+        </p:txBody>
+      </p:sp>
+    </p:spTree>
+  </p:cSld>
+  <p:clrMapOvr>
+    <a:masterClrMapping/>
+  </p:clrMapOvr>
+</p:sld>
+</file>
+
+<file path=ppt/slides/slide47.xml><?xml version="1.0" encoding="utf-8"?>
+<p:sld xmlns:a="http://schemas.openxmlformats.org/drawingml/2006/main" xmlns:p="http://schemas.openxmlformats.org/presentationml/2006/main" xmlns:r="http://schemas.openxmlformats.org/officeDocument/2006/relationships">
+  <p:cSld>
+    <p:spTree>
+      <p:nvGrpSpPr>
+        <p:cNvPr id="1" name=""/>
+        <p:cNvGrpSpPr/>
+        <p:nvPr/>
+      </p:nvGrpSpPr>
+      <p:grpSpPr/>
+      <p:sp>
+        <p:nvSpPr>
+          <p:cNvPr id="2" name="TextBox 1"/>
+          <p:cNvSpPr txBox="1"/>
+          <p:nvPr/>
+        </p:nvSpPr>
+        <p:spPr>
+          <a:xfrm>
+            <a:off x="1005840" y="1325880"/>
+            <a:ext cx="5486400" cy="365760"/>
+          </a:xfrm>
+          <a:prstGeom prst="rect">
+            <a:avLst/>
+          </a:prstGeom>
+          <a:noFill/>
+        </p:spPr>
+        <p:txBody>
+          <a:bodyPr wrap="square">
+            <a:spAutoFit/>
+          </a:bodyPr>
+          <a:lstStyle/>
+          <a:p>
+            <a:r>
+              <a:rPr sz="1200" b="1" i="0">
                 <a:solidFill>
                   <a:srgbClr val="006E96"/>
                 </a:solidFill>
                 <a:latin typeface="Arial"/>
               </a:rPr>
-              <a:t>KP1 · Government Enterprise Architecture · Module 3 · Video 3.6</a:t>
-            </a:r>
-          </a:p>
-          <a:p>
-            <a:r>
-              <a:rPr sz="1200" b="0" i="1">
+              <a:t>WHERE WE START</a:t>
+            </a:r>
+          </a:p>
+        </p:txBody>
+      </p:sp>
+      <p:sp>
+        <p:nvSpPr>
+          <p:cNvPr id="3" name="TextBox 2"/>
+          <p:cNvSpPr txBox="1"/>
+          <p:nvPr/>
+        </p:nvSpPr>
+        <p:spPr>
+          <a:xfrm>
+            <a:off x="1005840" y="1783080"/>
+            <a:ext cx="10149840" cy="1737360"/>
+          </a:xfrm>
+          <a:prstGeom prst="rect">
+            <a:avLst/>
+          </a:prstGeom>
+          <a:noFill/>
+        </p:spPr>
+        <p:txBody>
+          <a:bodyPr wrap="square">
+            <a:spAutoFit/>
+          </a:bodyPr>
+          <a:lstStyle/>
+          <a:p>
+            <a:r>
+              <a:rPr sz="3000" b="1" i="0">
+                <a:solidFill>
+                  <a:srgbClr val="1A1A1A"/>
+                </a:solidFill>
+                <a:latin typeface="Arial"/>
+              </a:rPr>
+              <a:t>Your minister’s fair question: is this EA work actually doing anything?</a:t>
+            </a:r>
+          </a:p>
+        </p:txBody>
+      </p:sp>
+      <p:sp>
+        <p:nvSpPr>
+          <p:cNvPr id="4" name="TextBox 3"/>
+          <p:cNvSpPr txBox="1"/>
+          <p:nvPr/>
+        </p:nvSpPr>
+        <p:spPr>
+          <a:xfrm>
+            <a:off x="1005840" y="3611880"/>
+            <a:ext cx="10149840" cy="2377440"/>
+          </a:xfrm>
+          <a:prstGeom prst="rect">
+            <a:avLst/>
+          </a:prstGeom>
+          <a:noFill/>
+        </p:spPr>
+        <p:txBody>
+          <a:bodyPr wrap="square">
+            <a:spAutoFit/>
+          </a:bodyPr>
+          <a:lstStyle/>
+          <a:p>
+            <a:pPr>
+              <a:spcAft>
+                <a:spcPts val="800"/>
+              </a:spcAft>
+            </a:pPr>
+            <a:r>
+              <a:rPr sz="1700" b="0" i="0">
                 <a:solidFill>
                   <a:srgbClr val="595959"/>
                 </a:solidFill>
                 <a:latin typeface="Arial"/>
               </a:rPr>
-              <a:t>A handful of honest metrics — coverage, re-use rate, open exceptions, decisions made — show the minister and the team that the EA is working, and tell you where it isn't, without drowning anyone in vanity numbers.</a:t>
-            </a:r>
-          </a:p>
-        </p:txBody>
-      </p:sp>
-      <p:sp>
-        <p:nvSpPr>
-          <p:cNvPr id="17" name="Title 9">
-            <a:extLst>
-              <a:ext uri="{FF2B5EF4-FFF2-40B4-BE49-F238E27FC236}">
-                <a16:creationId xmlns:a16="http://schemas.microsoft.com/office/drawing/2014/main" id="{5E8796F7-DD26-D250-5E97-B38B22298E72}"/>
-              </a:ext>
-            </a:extLst>
-          </p:cNvPr>
-          <p:cNvSpPr txBox="1">
-            <a:spLocks/>
-          </p:cNvSpPr>
+              <a:t>You need an answer that is honest, short and true.</a:t>
+            </a:r>
+          </a:p>
+          <a:p>
+            <a:pPr>
+              <a:spcAft>
+                <a:spcPts val="800"/>
+              </a:spcAft>
+            </a:pPr>
+            <a:r>
+              <a:rPr sz="1700" b="0" i="0">
+                <a:solidFill>
+                  <a:srgbClr val="595959"/>
+                </a:solidFill>
+                <a:latin typeface="Arial"/>
+              </a:rPr>
+              <a:t>A handful of metrics, not a fifty-page report. Pick them carefully.</a:t>
+            </a:r>
+          </a:p>
+        </p:txBody>
+      </p:sp>
+      <p:sp>
+        <p:nvSpPr>
+          <p:cNvPr id="5" name="TextBox 4"/>
+          <p:cNvSpPr txBox="1"/>
           <p:nvPr/>
         </p:nvSpPr>
         <p:spPr>
           <a:xfrm>
-            <a:off x="284452" y="4363897"/>
-            <a:ext cx="6382893" cy="953213"/>
+            <a:off x="457200" y="6473952"/>
+            <a:ext cx="7772400" cy="292608"/>
           </a:xfrm>
           <a:prstGeom prst="rect">
             <a:avLst/>
           </a:prstGeom>
-        </p:spPr>
-        <p:txBody>
-          <a:bodyPr anchor="t">
-            <a:noAutofit/>
+          <a:noFill/>
+        </p:spPr>
+        <p:txBody>
+          <a:bodyPr wrap="square">
+            <a:spAutoFit/>
           </a:bodyPr>
-          <a:lstStyle>
-            <a:lvl1pPr algn="l" defTabSz="914400" rtl="0" eaLnBrk="1" latinLnBrk="0" hangingPunct="1">
-              <a:lnSpc>
-                <a:spcPct val="90000"/>
-              </a:lnSpc>
-              <a:spcBef>
-                <a:spcPct val="0"/>
-              </a:spcBef>
-              <a:buNone/>
-              <a:defRPr sz="4000" kern="1200">
+          <a:lstStyle/>
+          <a:p>
+            <a:r>
+              <a:rPr sz="900" b="0" i="0">
                 <a:solidFill>
-                  <a:schemeClr val="bg1"/>
-                </a:solidFill>
-                <a:latin typeface="Arial" panose="020B0604020202020204" pitchFamily="34" charset="0"/>
-                <a:ea typeface="+mj-ea"/>
-                <a:cs typeface="Arial" panose="020B0604020202020204" pitchFamily="34" charset="0"/>
-              </a:defRPr>
-            </a:lvl1pPr>
-          </a:lstStyle>
-          <a:p>
-            <a:pPr marL="0" marR="0" lvl="0" indent="0" rtl="0">
-              <a:spcBef>
-                <a:spcPts val="600"/>
-              </a:spcBef>
-              <a:spcAft>
-                <a:spcPts val="1200"/>
-              </a:spcAft>
-              <a:buNone/>
-            </a:pPr>
-            <a:r>
-              <a:rPr sz="1400" b="1" i="0">
-                <a:solidFill>
-                  <a:srgbClr val="1A1A1A"/>
+                  <a:srgbClr val="595959"/>
                 </a:solidFill>
                 <a:latin typeface="Arial"/>
               </a:rPr>
-              <a:t>Target audience: </a:t>
-            </a:r>
-            <a:r>
-              <a:rPr sz="1400" b="0" i="0">
+              <a:t>3.6 · Show the EA is working — the few metrics that matter</a:t>
+            </a:r>
+          </a:p>
+        </p:txBody>
+      </p:sp>
+      <p:sp>
+        <p:nvSpPr>
+          <p:cNvPr id="6" name="TextBox 5"/>
+          <p:cNvSpPr txBox="1"/>
+          <p:nvPr/>
+        </p:nvSpPr>
+        <p:spPr>
+          <a:xfrm>
+            <a:off x="10058400" y="6473952"/>
+            <a:ext cx="1673352" cy="292608"/>
+          </a:xfrm>
+          <a:prstGeom prst="rect">
+            <a:avLst/>
+          </a:prstGeom>
+          <a:noFill/>
+        </p:spPr>
+        <p:txBody>
+          <a:bodyPr wrap="square">
+            <a:spAutoFit/>
+          </a:bodyPr>
+          <a:lstStyle/>
+          <a:p>
+            <a:pPr algn="r"/>
+            <a:r>
+              <a:rPr sz="900" b="0" i="0">
                 <a:solidFill>
-                  <a:srgbClr val="1A1A1A"/>
+                  <a:srgbClr val="595959"/>
                 </a:solidFill>
                 <a:latin typeface="Arial"/>
               </a:rPr>
-              <a:t>Chief architect · senior architect · sector ICT lead</a:t>
-            </a:r>
-          </a:p>
-        </p:txBody>
-      </p:sp>
-      <p:sp>
-        <p:nvSpPr>
-          <p:cNvPr id="18" name="Rectangle 17"/>
+              <a:t>www.itu.int</a:t>
+            </a:r>
+          </a:p>
+        </p:txBody>
+      </p:sp>
+    </p:spTree>
+  </p:cSld>
+  <p:clrMapOvr>
+    <a:masterClrMapping/>
+  </p:clrMapOvr>
+</p:sld>
+</file>
+
+<file path=ppt/slides/slide48.xml><?xml version="1.0" encoding="utf-8"?>
+<p:sld xmlns:a="http://schemas.openxmlformats.org/drawingml/2006/main" xmlns:p="http://schemas.openxmlformats.org/presentationml/2006/main" xmlns:r="http://schemas.openxmlformats.org/officeDocument/2006/relationships">
+  <p:cSld>
+    <p:spTree>
+      <p:nvGrpSpPr>
+        <p:cNvPr id="1" name=""/>
+        <p:cNvGrpSpPr/>
+        <p:nvPr/>
+      </p:nvGrpSpPr>
+      <p:grpSpPr/>
+      <p:sp>
+        <p:nvSpPr>
+          <p:cNvPr id="2" name="Rectangle 1"/>
           <p:cNvSpPr/>
           <p:nvPr/>
         </p:nvSpPr>
         <p:spPr>
           <a:xfrm>
-            <a:off x="7022592" y="0"/>
-            <a:ext cx="5169103" cy="6858000"/>
+            <a:off x="457200" y="384048"/>
+            <a:ext cx="45720" cy="256032"/>
           </a:xfrm>
           <a:prstGeom prst="rect">
             <a:avLst/>
@@ -11960,14 +12056,14 @@
       </p:sp>
       <p:sp>
         <p:nvSpPr>
-          <p:cNvPr id="19" name="TextBox 18"/>
+          <p:cNvPr id="3" name="TextBox 2"/>
           <p:cNvSpPr txBox="1"/>
           <p:nvPr/>
         </p:nvSpPr>
         <p:spPr>
           <a:xfrm>
-            <a:off x="7452360" y="457200"/>
-            <a:ext cx="4297680" cy="457200"/>
+            <a:off x="621792" y="274320"/>
+            <a:ext cx="11247120" cy="914400"/>
           </a:xfrm>
           <a:prstGeom prst="rect">
             <a:avLst/>
@@ -11981,35 +12077,33 @@
           <a:lstStyle/>
           <a:p>
             <a:r>
-              <a:rPr sz="1100" b="1" i="0">
+              <a:rPr sz="2800" b="1" i="0">
                 <a:solidFill>
-                  <a:srgbClr val="E5F5FB"/>
+                  <a:srgbClr val="1A1A1A"/>
                 </a:solidFill>
                 <a:latin typeface="Arial"/>
               </a:rPr>
-              <a:t>THE PRACTICE THIS MODULE STANDS UP</a:t>
-            </a:r>
-          </a:p>
-        </p:txBody>
-      </p:sp>
-      <p:sp>
-        <p:nvSpPr>
-          <p:cNvPr id="20" name="Rounded Rectangle 19"/>
+              <a:t>Four numbers carry most of the signal</a:t>
+            </a:r>
+          </a:p>
+        </p:txBody>
+      </p:sp>
+      <p:sp>
+        <p:nvSpPr>
+          <p:cNvPr id="4" name="Oval 3"/>
           <p:cNvSpPr/>
           <p:nvPr/>
         </p:nvSpPr>
         <p:spPr>
           <a:xfrm>
-            <a:off x="7452360" y="960120"/>
-            <a:ext cx="3840480" cy="658368"/>
-          </a:xfrm>
-          <a:prstGeom prst="roundRect">
-            <a:avLst>
-              <a:gd name="adj" fmla="val 14000"/>
-            </a:avLst>
+            <a:off x="621792" y="1508760"/>
+            <a:ext cx="310896" cy="310896"/>
+          </a:xfrm>
+          <a:prstGeom prst="ellipse">
+            <a:avLst/>
           </a:prstGeom>
           <a:solidFill>
-            <a:srgbClr val="FFFFFF"/>
+            <a:srgbClr val="009CD6"/>
           </a:solidFill>
           <a:ln>
             <a:noFill/>
@@ -12031,40 +12125,93 @@
           </a:fontRef>
         </p:style>
         <p:txBody>
-          <a:bodyPr rtlCol="0" anchor="ctr" lIns="164592" wrap="square"/>
+          <a:bodyPr rtlCol="0" anchor="ctr" lIns="0" rIns="0" tIns="0" bIns="0" wrap="square"/>
           <a:lstStyle/>
           <a:p>
             <a:pPr algn="ctr"/>
             <a:r>
-              <a:rPr sz="1500" b="1" i="0">
+              <a:rPr sz="1300" b="1" i="0">
+                <a:solidFill>
+                  <a:srgbClr val="FFFFFF"/>
+                </a:solidFill>
+                <a:latin typeface="Arial"/>
+              </a:rPr>
+              <a:t>1</a:t>
+            </a:r>
+          </a:p>
+        </p:txBody>
+      </p:sp>
+      <p:sp>
+        <p:nvSpPr>
+          <p:cNvPr id="5" name="TextBox 4"/>
+          <p:cNvSpPr txBox="1"/>
+          <p:nvPr/>
+        </p:nvSpPr>
+        <p:spPr>
+          <a:xfrm>
+            <a:off x="1115568" y="1463040"/>
+            <a:ext cx="10527487" cy="1028699"/>
+          </a:xfrm>
+          <a:prstGeom prst="rect">
+            <a:avLst/>
+          </a:prstGeom>
+          <a:noFill/>
+        </p:spPr>
+        <p:txBody>
+          <a:bodyPr wrap="square">
+            <a:spAutoFit/>
+          </a:bodyPr>
+          <a:lstStyle/>
+          <a:p>
+            <a:pPr>
+              <a:spcAft>
+                <a:spcPts val="300"/>
+              </a:spcAft>
+            </a:pPr>
+            <a:r>
+              <a:rPr sz="1900" b="1" i="0">
                 <a:solidFill>
                   <a:srgbClr val="1A1A1A"/>
                 </a:solidFill>
                 <a:latin typeface="Arial"/>
               </a:rPr>
-              <a:t>Repository — where the architecture lives</a:t>
-            </a:r>
-          </a:p>
-        </p:txBody>
-      </p:sp>
-      <p:sp>
-        <p:nvSpPr>
-          <p:cNvPr id="21" name="Rounded Rectangle 20"/>
+              <a:t>Coverage</a:t>
+            </a:r>
+          </a:p>
+          <a:p>
+            <a:pPr>
+              <a:spcAft>
+                <a:spcPts val="300"/>
+              </a:spcAft>
+            </a:pPr>
+            <a:r>
+              <a:rPr sz="1550" b="0" i="0">
+                <a:solidFill>
+                  <a:srgbClr val="595959"/>
+                </a:solidFill>
+                <a:latin typeface="Arial"/>
+              </a:rPr>
+              <a:t>How much of your government is actually in the repository — and current.</a:t>
+            </a:r>
+          </a:p>
+        </p:txBody>
+      </p:sp>
+      <p:sp>
+        <p:nvSpPr>
+          <p:cNvPr id="6" name="Rectangle 5"/>
           <p:cNvSpPr/>
           <p:nvPr/>
         </p:nvSpPr>
         <p:spPr>
           <a:xfrm>
-            <a:off x="7452360" y="1892808"/>
-            <a:ext cx="3840480" cy="658368"/>
-          </a:xfrm>
-          <a:prstGeom prst="roundRect">
-            <a:avLst>
-              <a:gd name="adj" fmla="val 14000"/>
-            </a:avLst>
+            <a:off x="621792" y="2496312"/>
+            <a:ext cx="10881360" cy="12700"/>
+          </a:xfrm>
+          <a:prstGeom prst="rect">
+            <a:avLst/>
           </a:prstGeom>
           <a:solidFill>
-            <a:srgbClr val="FFFFFF"/>
+            <a:srgbClr val="DDECF4"/>
           </a:solidFill>
           <a:ln>
             <a:noFill/>
@@ -12086,40 +12233,29 @@
           </a:fontRef>
         </p:style>
         <p:txBody>
-          <a:bodyPr rtlCol="0" anchor="ctr" lIns="164592" wrap="square"/>
+          <a:bodyPr rtlCol="0" anchor="ctr"/>
           <a:lstStyle/>
           <a:p>
             <a:pPr algn="ctr"/>
-            <a:r>
-              <a:rPr sz="1500" b="1" i="0">
-                <a:solidFill>
-                  <a:srgbClr val="1A1A1A"/>
-                </a:solidFill>
-                <a:latin typeface="Arial"/>
-              </a:rPr>
-              <a:t>Tooling — chosen without lock-in</a:t>
-            </a:r>
-          </a:p>
-        </p:txBody>
-      </p:sp>
-      <p:sp>
-        <p:nvSpPr>
-          <p:cNvPr id="22" name="Rounded Rectangle 21"/>
+          </a:p>
+        </p:txBody>
+      </p:sp>
+      <p:sp>
+        <p:nvSpPr>
+          <p:cNvPr id="7" name="Oval 6"/>
           <p:cNvSpPr/>
           <p:nvPr/>
         </p:nvSpPr>
         <p:spPr>
           <a:xfrm>
-            <a:off x="7452360" y="2825496"/>
-            <a:ext cx="3840480" cy="658368"/>
-          </a:xfrm>
-          <a:prstGeom prst="roundRect">
-            <a:avLst>
-              <a:gd name="adj" fmla="val 14000"/>
-            </a:avLst>
+            <a:off x="621792" y="2583179"/>
+            <a:ext cx="310896" cy="310896"/>
+          </a:xfrm>
+          <a:prstGeom prst="ellipse">
+            <a:avLst/>
           </a:prstGeom>
           <a:solidFill>
-            <a:srgbClr val="FFFFFF"/>
+            <a:srgbClr val="009CD6"/>
           </a:solidFill>
           <a:ln>
             <a:noFill/>
@@ -12141,40 +12277,93 @@
           </a:fontRef>
         </p:style>
         <p:txBody>
-          <a:bodyPr rtlCol="0" anchor="ctr" lIns="164592" wrap="square"/>
+          <a:bodyPr rtlCol="0" anchor="ctr" lIns="0" rIns="0" tIns="0" bIns="0" wrap="square"/>
           <a:lstStyle/>
           <a:p>
             <a:pPr algn="ctr"/>
             <a:r>
-              <a:rPr sz="1500" b="1" i="0">
+              <a:rPr sz="1300" b="1" i="0">
+                <a:solidFill>
+                  <a:srgbClr val="FFFFFF"/>
+                </a:solidFill>
+                <a:latin typeface="Arial"/>
+              </a:rPr>
+              <a:t>2</a:t>
+            </a:r>
+          </a:p>
+        </p:txBody>
+      </p:sp>
+      <p:sp>
+        <p:nvSpPr>
+          <p:cNvPr id="8" name="TextBox 7"/>
+          <p:cNvSpPr txBox="1"/>
+          <p:nvPr/>
+        </p:nvSpPr>
+        <p:spPr>
+          <a:xfrm>
+            <a:off x="1115568" y="2537460"/>
+            <a:ext cx="10527487" cy="1028699"/>
+          </a:xfrm>
+          <a:prstGeom prst="rect">
+            <a:avLst/>
+          </a:prstGeom>
+          <a:noFill/>
+        </p:spPr>
+        <p:txBody>
+          <a:bodyPr wrap="square">
+            <a:spAutoFit/>
+          </a:bodyPr>
+          <a:lstStyle/>
+          <a:p>
+            <a:pPr>
+              <a:spcAft>
+                <a:spcPts val="300"/>
+              </a:spcAft>
+            </a:pPr>
+            <a:r>
+              <a:rPr sz="1900" b="1" i="0">
                 <a:solidFill>
                   <a:srgbClr val="1A1A1A"/>
                 </a:solidFill>
                 <a:latin typeface="Arial"/>
               </a:rPr>
-              <a:t>Governance — a Board and a gate</a:t>
-            </a:r>
-          </a:p>
-        </p:txBody>
-      </p:sp>
-      <p:sp>
-        <p:nvSpPr>
-          <p:cNvPr id="23" name="Rounded Rectangle 22"/>
+              <a:t>Re-use rate</a:t>
+            </a:r>
+          </a:p>
+          <a:p>
+            <a:pPr>
+              <a:spcAft>
+                <a:spcPts val="300"/>
+              </a:spcAft>
+            </a:pPr>
+            <a:r>
+              <a:rPr sz="1550" b="0" i="0">
+                <a:solidFill>
+                  <a:srgbClr val="595959"/>
+                </a:solidFill>
+                <a:latin typeface="Arial"/>
+              </a:rPr>
+              <a:t>Of the projects that came through the gate, how many consumed a shared block instead of building their own.</a:t>
+            </a:r>
+          </a:p>
+        </p:txBody>
+      </p:sp>
+      <p:sp>
+        <p:nvSpPr>
+          <p:cNvPr id="9" name="Rectangle 8"/>
           <p:cNvSpPr/>
           <p:nvPr/>
         </p:nvSpPr>
         <p:spPr>
           <a:xfrm>
-            <a:off x="7452360" y="3758184"/>
-            <a:ext cx="3840480" cy="658368"/>
-          </a:xfrm>
-          <a:prstGeom prst="roundRect">
-            <a:avLst>
-              <a:gd name="adj" fmla="val 14000"/>
-            </a:avLst>
+            <a:off x="621792" y="3570732"/>
+            <a:ext cx="10881360" cy="12700"/>
+          </a:xfrm>
+          <a:prstGeom prst="rect">
+            <a:avLst/>
           </a:prstGeom>
           <a:solidFill>
-            <a:srgbClr val="006E96"/>
+            <a:srgbClr val="DDECF4"/>
           </a:solidFill>
           <a:ln>
             <a:noFill/>
@@ -12196,279 +12385,25 @@
           </a:fontRef>
         </p:style>
         <p:txBody>
-          <a:bodyPr rtlCol="0" anchor="ctr" lIns="164592" wrap="square"/>
+          <a:bodyPr rtlCol="0" anchor="ctr"/>
           <a:lstStyle/>
           <a:p>
             <a:pPr algn="ctr"/>
-            <a:r>
-              <a:rPr sz="1500" b="1" i="0">
-                <a:solidFill>
-                  <a:srgbClr val="FFFFFF"/>
-                </a:solidFill>
-                <a:latin typeface="Arial"/>
-              </a:rPr>
-              <a:t>Sustainment — alive past year two</a:t>
-            </a:r>
-          </a:p>
-        </p:txBody>
-      </p:sp>
-      <p:sp>
-        <p:nvSpPr>
-          <p:cNvPr id="24" name="TextBox 23"/>
-          <p:cNvSpPr txBox="1"/>
-          <p:nvPr/>
-        </p:nvSpPr>
-        <p:spPr>
-          <a:xfrm>
-            <a:off x="7452360" y="5806440"/>
-            <a:ext cx="4297680" cy="731520"/>
-          </a:xfrm>
-          <a:prstGeom prst="rect">
-            <a:avLst/>
-          </a:prstGeom>
-          <a:noFill/>
-        </p:spPr>
-        <p:txBody>
-          <a:bodyPr wrap="square">
-            <a:spAutoFit/>
-          </a:bodyPr>
-          <a:lstStyle/>
-          <a:p>
-            <a:r>
-              <a:rPr sz="1200" b="0" i="0">
-                <a:solidFill>
-                  <a:srgbClr val="FFFFFF"/>
-                </a:solidFill>
-                <a:latin typeface="Arial"/>
-              </a:rPr>
-              <a:t>5 gate questions · 4 health metrics · 4 ways a practice fades</a:t>
-            </a:r>
-          </a:p>
-        </p:txBody>
-      </p:sp>
-    </p:spTree>
-    <p:extLst>
-      <p:ext uri="{BB962C8B-B14F-4D97-AF65-F5344CB8AC3E}">
-        <p14:creationId xmlns:p14="http://schemas.microsoft.com/office/powerpoint/2010/main" val="1196800265"/>
-      </p:ext>
-    </p:extLst>
-  </p:cSld>
-  <p:clrMapOvr>
-    <a:masterClrMapping/>
-  </p:clrMapOvr>
-</p:sld>
-</file>
-
-<file path=ppt/slides/slide41.xml><?xml version="1.0" encoding="utf-8"?>
-<p:sld xmlns:a="http://schemas.openxmlformats.org/drawingml/2006/main" xmlns:p="http://schemas.openxmlformats.org/presentationml/2006/main" xmlns:r="http://schemas.openxmlformats.org/officeDocument/2006/relationships">
-  <p:cSld>
-    <p:spTree>
-      <p:nvGrpSpPr>
-        <p:cNvPr id="1" name=""/>
-        <p:cNvGrpSpPr/>
-        <p:nvPr/>
-      </p:nvGrpSpPr>
-      <p:grpSpPr/>
-      <p:sp>
-        <p:nvSpPr>
-          <p:cNvPr id="2" name="TextBox 1"/>
-          <p:cNvSpPr txBox="1"/>
-          <p:nvPr/>
-        </p:nvSpPr>
-        <p:spPr>
-          <a:xfrm>
-            <a:off x="822960" y="822960"/>
-            <a:ext cx="7315200" cy="457200"/>
-          </a:xfrm>
-          <a:prstGeom prst="rect">
-            <a:avLst/>
-          </a:prstGeom>
-          <a:noFill/>
-        </p:spPr>
-        <p:txBody>
-          <a:bodyPr wrap="square">
-            <a:spAutoFit/>
-          </a:bodyPr>
-          <a:lstStyle/>
-          <a:p>
-            <a:r>
-              <a:rPr sz="1200" b="1" i="0">
-                <a:solidFill>
-                  <a:srgbClr val="595959"/>
-                </a:solidFill>
-                <a:latin typeface="Arial"/>
-              </a:rPr>
-              <a:t>KP1 · MODULE 3 · VIDEO 3.6</a:t>
-            </a:r>
-          </a:p>
-        </p:txBody>
-      </p:sp>
-      <p:sp>
-        <p:nvSpPr>
-          <p:cNvPr id="3" name="TextBox 2"/>
-          <p:cNvSpPr txBox="1"/>
-          <p:nvPr/>
-        </p:nvSpPr>
-        <p:spPr>
-          <a:xfrm>
-            <a:off x="822960" y="1828800"/>
-            <a:ext cx="2011680" cy="1097280"/>
-          </a:xfrm>
-          <a:prstGeom prst="rect">
-            <a:avLst/>
-          </a:prstGeom>
-          <a:noFill/>
-        </p:spPr>
-        <p:txBody>
-          <a:bodyPr wrap="square">
-            <a:spAutoFit/>
-          </a:bodyPr>
-          <a:lstStyle/>
-          <a:p>
-            <a:r>
-              <a:rPr sz="6000" b="1" i="0">
-                <a:solidFill>
-                  <a:srgbClr val="009CD6"/>
-                </a:solidFill>
-                <a:latin typeface="Arial"/>
-              </a:rPr>
-              <a:t>3.6</a:t>
-            </a:r>
-          </a:p>
-        </p:txBody>
-      </p:sp>
-      <p:sp>
-        <p:nvSpPr>
-          <p:cNvPr id="4" name="TextBox 3"/>
-          <p:cNvSpPr txBox="1"/>
-          <p:nvPr/>
-        </p:nvSpPr>
-        <p:spPr>
-          <a:xfrm>
-            <a:off x="822960" y="2880360"/>
-            <a:ext cx="9601200" cy="1371600"/>
-          </a:xfrm>
-          <a:prstGeom prst="rect">
-            <a:avLst/>
-          </a:prstGeom>
-          <a:noFill/>
-        </p:spPr>
-        <p:txBody>
-          <a:bodyPr wrap="square">
-            <a:spAutoFit/>
-          </a:bodyPr>
-          <a:lstStyle/>
-          <a:p>
-            <a:r>
-              <a:rPr sz="3400" b="1" i="0">
-                <a:solidFill>
-                  <a:srgbClr val="1A1A1A"/>
-                </a:solidFill>
-                <a:latin typeface="Arial"/>
-              </a:rPr>
-              <a:t>Show the EA is working — the few metrics that matter</a:t>
-            </a:r>
-          </a:p>
-        </p:txBody>
-      </p:sp>
-      <p:sp>
-        <p:nvSpPr>
-          <p:cNvPr id="5" name="TextBox 4"/>
-          <p:cNvSpPr txBox="1"/>
-          <p:nvPr/>
-        </p:nvSpPr>
-        <p:spPr>
-          <a:xfrm>
-            <a:off x="822960" y="4343400"/>
-            <a:ext cx="9875520" cy="1554480"/>
-          </a:xfrm>
-          <a:prstGeom prst="rect">
-            <a:avLst/>
-          </a:prstGeom>
-          <a:noFill/>
-        </p:spPr>
-        <p:txBody>
-          <a:bodyPr wrap="square">
-            <a:spAutoFit/>
-          </a:bodyPr>
-          <a:lstStyle/>
-          <a:p>
-            <a:r>
-              <a:rPr sz="1700" b="0" i="1">
-                <a:solidFill>
-                  <a:srgbClr val="595959"/>
-                </a:solidFill>
-                <a:latin typeface="Arial"/>
-              </a:rPr>
-              <a:t>A handful of honest metrics — coverage, re-use rate, open exceptions, decisions made — show the minister and the team that the EA is working, and tell you where it isn’t, without drowning anyone in vanity numbers.</a:t>
-            </a:r>
-          </a:p>
-        </p:txBody>
-      </p:sp>
-      <p:sp>
-        <p:nvSpPr>
-          <p:cNvPr id="6" name="TextBox 5"/>
-          <p:cNvSpPr txBox="1"/>
-          <p:nvPr/>
-        </p:nvSpPr>
-        <p:spPr>
-          <a:xfrm>
-            <a:off x="822960" y="5989320"/>
-            <a:ext cx="7315200" cy="365760"/>
-          </a:xfrm>
-          <a:prstGeom prst="rect">
-            <a:avLst/>
-          </a:prstGeom>
-          <a:noFill/>
-        </p:spPr>
-        <p:txBody>
-          <a:bodyPr wrap="square">
-            <a:spAutoFit/>
-          </a:bodyPr>
-          <a:lstStyle/>
-          <a:p>
-            <a:r>
-              <a:rPr sz="1200" b="0" i="0">
-                <a:solidFill>
-                  <a:srgbClr val="595959"/>
-                </a:solidFill>
-                <a:latin typeface="Arial"/>
-              </a:rPr>
-              <a:t>~4 minutes · standalone video · voice-over on text slides</a:t>
-            </a:r>
-          </a:p>
-        </p:txBody>
-      </p:sp>
-    </p:spTree>
-  </p:cSld>
-  <p:clrMapOvr>
-    <a:masterClrMapping/>
-  </p:clrMapOvr>
-</p:sld>
-</file>
-
-<file path=ppt/slides/slide42.xml><?xml version="1.0" encoding="utf-8"?>
-<p:sld xmlns:a="http://schemas.openxmlformats.org/drawingml/2006/main" xmlns:p="http://schemas.openxmlformats.org/presentationml/2006/main" xmlns:r="http://schemas.openxmlformats.org/officeDocument/2006/relationships">
-  <p:cSld>
-    <p:spTree>
-      <p:nvGrpSpPr>
-        <p:cNvPr id="1" name=""/>
-        <p:cNvGrpSpPr/>
-        <p:nvPr/>
-      </p:nvGrpSpPr>
-      <p:grpSpPr/>
-      <p:sp>
-        <p:nvSpPr>
-          <p:cNvPr id="2" name="Rectangle 1"/>
+          </a:p>
+        </p:txBody>
+      </p:sp>
+      <p:sp>
+        <p:nvSpPr>
+          <p:cNvPr id="10" name="Oval 9"/>
           <p:cNvSpPr/>
           <p:nvPr/>
         </p:nvSpPr>
         <p:spPr>
           <a:xfrm>
-            <a:off x="457200" y="384048"/>
-            <a:ext cx="45720" cy="256032"/>
-          </a:xfrm>
-          <a:prstGeom prst="rect">
+            <a:off x="621792" y="3657599"/>
+            <a:ext cx="310896" cy="310896"/>
+          </a:xfrm>
+          <a:prstGeom prst="ellipse">
             <a:avLst/>
           </a:prstGeom>
           <a:solidFill>
@@ -12494,23 +12429,32 @@
           </a:fontRef>
         </p:style>
         <p:txBody>
-          <a:bodyPr rtlCol="0" anchor="ctr"/>
+          <a:bodyPr rtlCol="0" anchor="ctr" lIns="0" rIns="0" tIns="0" bIns="0" wrap="square"/>
           <a:lstStyle/>
           <a:p>
             <a:pPr algn="ctr"/>
-          </a:p>
-        </p:txBody>
-      </p:sp>
-      <p:sp>
-        <p:nvSpPr>
-          <p:cNvPr id="3" name="TextBox 2"/>
+            <a:r>
+              <a:rPr sz="1300" b="1" i="0">
+                <a:solidFill>
+                  <a:srgbClr val="FFFFFF"/>
+                </a:solidFill>
+                <a:latin typeface="Arial"/>
+              </a:rPr>
+              <a:t>3</a:t>
+            </a:r>
+          </a:p>
+        </p:txBody>
+      </p:sp>
+      <p:sp>
+        <p:nvSpPr>
+          <p:cNvPr id="11" name="TextBox 10"/>
           <p:cNvSpPr txBox="1"/>
           <p:nvPr/>
         </p:nvSpPr>
         <p:spPr>
           <a:xfrm>
-            <a:off x="621792" y="274320"/>
-            <a:ext cx="11247120" cy="914400"/>
+            <a:off x="1115568" y="3611879"/>
+            <a:ext cx="10527487" cy="1028699"/>
           </a:xfrm>
           <a:prstGeom prst="rect">
             <a:avLst/>
@@ -12523,34 +12467,55 @@
           </a:bodyPr>
           <a:lstStyle/>
           <a:p>
-            <a:r>
-              <a:rPr sz="2800" b="1" i="0">
+            <a:pPr>
+              <a:spcAft>
+                <a:spcPts val="300"/>
+              </a:spcAft>
+            </a:pPr>
+            <a:r>
+              <a:rPr sz="1900" b="1" i="0">
                 <a:solidFill>
                   <a:srgbClr val="1A1A1A"/>
                 </a:solidFill>
                 <a:latin typeface="Arial"/>
               </a:rPr>
-              <a:t>Four numbers carry most of the signal</a:t>
-            </a:r>
-          </a:p>
-        </p:txBody>
-      </p:sp>
-      <p:sp>
-        <p:nvSpPr>
-          <p:cNvPr id="4" name="Oval 3"/>
+              <a:t>Open exceptions</a:t>
+            </a:r>
+          </a:p>
+          <a:p>
+            <a:pPr>
+              <a:spcAft>
+                <a:spcPts val="300"/>
+              </a:spcAft>
+            </a:pPr>
+            <a:r>
+              <a:rPr sz="1550" b="0" i="0">
+                <a:solidFill>
+                  <a:srgbClr val="595959"/>
+                </a:solidFill>
+                <a:latin typeface="Arial"/>
+              </a:rPr>
+              <a:t>How many waivers are outstanding, and how old.</a:t>
+            </a:r>
+          </a:p>
+        </p:txBody>
+      </p:sp>
+      <p:sp>
+        <p:nvSpPr>
+          <p:cNvPr id="12" name="Rectangle 11"/>
           <p:cNvSpPr/>
           <p:nvPr/>
         </p:nvSpPr>
         <p:spPr>
           <a:xfrm>
-            <a:off x="621792" y="1508760"/>
-            <a:ext cx="310896" cy="310896"/>
-          </a:xfrm>
-          <a:prstGeom prst="ellipse">
+            <a:off x="621792" y="4645152"/>
+            <a:ext cx="10881360" cy="12700"/>
+          </a:xfrm>
+          <a:prstGeom prst="rect">
             <a:avLst/>
           </a:prstGeom>
           <a:solidFill>
-            <a:srgbClr val="009CD6"/>
+            <a:srgbClr val="DDECF4"/>
           </a:solidFill>
           <a:ln>
             <a:noFill/>
@@ -12572,93 +12537,29 @@
           </a:fontRef>
         </p:style>
         <p:txBody>
-          <a:bodyPr rtlCol="0" anchor="ctr" lIns="0" rIns="0" tIns="0" bIns="0" wrap="square"/>
+          <a:bodyPr rtlCol="0" anchor="ctr"/>
           <a:lstStyle/>
           <a:p>
             <a:pPr algn="ctr"/>
-            <a:r>
-              <a:rPr sz="1300" b="1" i="0">
-                <a:solidFill>
-                  <a:srgbClr val="FFFFFF"/>
-                </a:solidFill>
-                <a:latin typeface="Arial"/>
-              </a:rPr>
-              <a:t>1</a:t>
-            </a:r>
-          </a:p>
-        </p:txBody>
-      </p:sp>
-      <p:sp>
-        <p:nvSpPr>
-          <p:cNvPr id="5" name="TextBox 4"/>
-          <p:cNvSpPr txBox="1"/>
-          <p:nvPr/>
-        </p:nvSpPr>
-        <p:spPr>
-          <a:xfrm>
-            <a:off x="1115568" y="1463040"/>
-            <a:ext cx="10527487" cy="1028699"/>
-          </a:xfrm>
-          <a:prstGeom prst="rect">
-            <a:avLst/>
-          </a:prstGeom>
-          <a:noFill/>
-        </p:spPr>
-        <p:txBody>
-          <a:bodyPr wrap="square">
-            <a:spAutoFit/>
-          </a:bodyPr>
-          <a:lstStyle/>
-          <a:p>
-            <a:pPr>
-              <a:spcAft>
-                <a:spcPts val="300"/>
-              </a:spcAft>
-            </a:pPr>
-            <a:r>
-              <a:rPr sz="1900" b="1" i="0">
-                <a:solidFill>
-                  <a:srgbClr val="1A1A1A"/>
-                </a:solidFill>
-                <a:latin typeface="Arial"/>
-              </a:rPr>
-              <a:t>Coverage</a:t>
-            </a:r>
-          </a:p>
-          <a:p>
-            <a:pPr>
-              <a:spcAft>
-                <a:spcPts val="300"/>
-              </a:spcAft>
-            </a:pPr>
-            <a:r>
-              <a:rPr sz="1550" b="0" i="0">
-                <a:solidFill>
-                  <a:srgbClr val="595959"/>
-                </a:solidFill>
-                <a:latin typeface="Arial"/>
-              </a:rPr>
-              <a:t>How much of your government is actually in the repository — and current.</a:t>
-            </a:r>
-          </a:p>
-        </p:txBody>
-      </p:sp>
-      <p:sp>
-        <p:nvSpPr>
-          <p:cNvPr id="6" name="Rectangle 5"/>
+          </a:p>
+        </p:txBody>
+      </p:sp>
+      <p:sp>
+        <p:nvSpPr>
+          <p:cNvPr id="13" name="Oval 12"/>
           <p:cNvSpPr/>
           <p:nvPr/>
         </p:nvSpPr>
         <p:spPr>
           <a:xfrm>
-            <a:off x="621792" y="2496312"/>
-            <a:ext cx="10881360" cy="12700"/>
-          </a:xfrm>
-          <a:prstGeom prst="rect">
+            <a:off x="621792" y="4732020"/>
+            <a:ext cx="310896" cy="310896"/>
+          </a:xfrm>
+          <a:prstGeom prst="ellipse">
             <a:avLst/>
           </a:prstGeom>
           <a:solidFill>
-            <a:srgbClr val="DDECF4"/>
+            <a:srgbClr val="009CD6"/>
           </a:solidFill>
           <a:ln>
             <a:noFill/>
@@ -12680,25 +12581,175 @@
           </a:fontRef>
         </p:style>
         <p:txBody>
-          <a:bodyPr rtlCol="0" anchor="ctr"/>
+          <a:bodyPr rtlCol="0" anchor="ctr" lIns="0" rIns="0" tIns="0" bIns="0" wrap="square"/>
           <a:lstStyle/>
           <a:p>
             <a:pPr algn="ctr"/>
-          </a:p>
-        </p:txBody>
-      </p:sp>
-      <p:sp>
-        <p:nvSpPr>
-          <p:cNvPr id="7" name="Oval 6"/>
+            <a:r>
+              <a:rPr sz="1300" b="1" i="0">
+                <a:solidFill>
+                  <a:srgbClr val="FFFFFF"/>
+                </a:solidFill>
+                <a:latin typeface="Arial"/>
+              </a:rPr>
+              <a:t>4</a:t>
+            </a:r>
+          </a:p>
+        </p:txBody>
+      </p:sp>
+      <p:sp>
+        <p:nvSpPr>
+          <p:cNvPr id="14" name="TextBox 13"/>
+          <p:cNvSpPr txBox="1"/>
+          <p:nvPr/>
+        </p:nvSpPr>
+        <p:spPr>
+          <a:xfrm>
+            <a:off x="1115568" y="4686300"/>
+            <a:ext cx="10527487" cy="1028699"/>
+          </a:xfrm>
+          <a:prstGeom prst="rect">
+            <a:avLst/>
+          </a:prstGeom>
+          <a:noFill/>
+        </p:spPr>
+        <p:txBody>
+          <a:bodyPr wrap="square">
+            <a:spAutoFit/>
+          </a:bodyPr>
+          <a:lstStyle/>
+          <a:p>
+            <a:pPr>
+              <a:spcAft>
+                <a:spcPts val="300"/>
+              </a:spcAft>
+            </a:pPr>
+            <a:r>
+              <a:rPr sz="1900" b="1" i="0">
+                <a:solidFill>
+                  <a:srgbClr val="1A1A1A"/>
+                </a:solidFill>
+                <a:latin typeface="Arial"/>
+              </a:rPr>
+              <a:t>Decisions</a:t>
+            </a:r>
+          </a:p>
+          <a:p>
+            <a:pPr>
+              <a:spcAft>
+                <a:spcPts val="300"/>
+              </a:spcAft>
+            </a:pPr>
+            <a:r>
+              <a:rPr sz="1550" b="0" i="0">
+                <a:solidFill>
+                  <a:srgbClr val="595959"/>
+                </a:solidFill>
+                <a:latin typeface="Arial"/>
+              </a:rPr>
+              <a:t>How many gate decisions the Board made — and how fast.</a:t>
+            </a:r>
+          </a:p>
+        </p:txBody>
+      </p:sp>
+      <p:sp>
+        <p:nvSpPr>
+          <p:cNvPr id="15" name="TextBox 14"/>
+          <p:cNvSpPr txBox="1"/>
+          <p:nvPr/>
+        </p:nvSpPr>
+        <p:spPr>
+          <a:xfrm>
+            <a:off x="658368" y="5870448"/>
+            <a:ext cx="10881360" cy="548640"/>
+          </a:xfrm>
+          <a:prstGeom prst="rect">
+            <a:avLst/>
+          </a:prstGeom>
+          <a:noFill/>
+        </p:spPr>
+        <p:txBody>
+          <a:bodyPr wrap="square">
+            <a:spAutoFit/>
+          </a:bodyPr>
+          <a:lstStyle/>
+          <a:p>
+            <a:r>
+              <a:rPr sz="1550" b="1" i="0">
+                <a:solidFill>
+                  <a:srgbClr val="006E96"/>
+                </a:solidFill>
+                <a:latin typeface="Arial"/>
+              </a:rPr>
+              <a:t>A growing pile of aged exceptions is fragmentation returning; a slow gate is one projects route around.</a:t>
+            </a:r>
+          </a:p>
+        </p:txBody>
+      </p:sp>
+      <p:sp>
+        <p:nvSpPr>
+          <p:cNvPr id="16" name="TextBox 15"/>
+          <p:cNvSpPr txBox="1"/>
+          <p:nvPr/>
+        </p:nvSpPr>
+        <p:spPr>
+          <a:xfrm>
+            <a:off x="457200" y="6473952"/>
+            <a:ext cx="7772400" cy="292608"/>
+          </a:xfrm>
+          <a:prstGeom prst="rect">
+            <a:avLst/>
+          </a:prstGeom>
+          <a:noFill/>
+        </p:spPr>
+        <p:txBody>
+          <a:bodyPr wrap="square">
+            <a:spAutoFit/>
+          </a:bodyPr>
+          <a:lstStyle/>
+          <a:p>
+            <a:r>
+              <a:rPr sz="900" b="0" i="0">
+                <a:solidFill>
+                  <a:srgbClr val="595959"/>
+                </a:solidFill>
+                <a:latin typeface="Arial"/>
+              </a:rPr>
+              <a:t>3.6 · Show the EA is working — the few metrics that matter</a:t>
+            </a:r>
+          </a:p>
+        </p:txBody>
+      </p:sp>
+    </p:spTree>
+  </p:cSld>
+  <p:clrMapOvr>
+    <a:masterClrMapping/>
+  </p:clrMapOvr>
+</p:sld>
+</file>
+
+<file path=ppt/slides/slide49.xml><?xml version="1.0" encoding="utf-8"?>
+<p:sld xmlns:a="http://schemas.openxmlformats.org/drawingml/2006/main" xmlns:p="http://schemas.openxmlformats.org/presentationml/2006/main" xmlns:r="http://schemas.openxmlformats.org/officeDocument/2006/relationships">
+  <p:cSld>
+    <p:spTree>
+      <p:nvGrpSpPr>
+        <p:cNvPr id="1" name=""/>
+        <p:cNvGrpSpPr/>
+        <p:nvPr/>
+      </p:nvGrpSpPr>
+      <p:grpSpPr/>
+      <p:sp>
+        <p:nvSpPr>
+          <p:cNvPr id="2" name="Rectangle 1"/>
           <p:cNvSpPr/>
           <p:nvPr/>
         </p:nvSpPr>
         <p:spPr>
           <a:xfrm>
-            <a:off x="621792" y="2583179"/>
-            <a:ext cx="310896" cy="310896"/>
-          </a:xfrm>
-          <a:prstGeom prst="ellipse">
+            <a:off x="457200" y="384048"/>
+            <a:ext cx="45720" cy="256032"/>
+          </a:xfrm>
+          <a:prstGeom prst="rect">
             <a:avLst/>
           </a:prstGeom>
           <a:solidFill>
@@ -12724,32 +12775,23 @@
           </a:fontRef>
         </p:style>
         <p:txBody>
-          <a:bodyPr rtlCol="0" anchor="ctr" lIns="0" rIns="0" tIns="0" bIns="0" wrap="square"/>
+          <a:bodyPr rtlCol="0" anchor="ctr"/>
           <a:lstStyle/>
           <a:p>
             <a:pPr algn="ctr"/>
-            <a:r>
-              <a:rPr sz="1300" b="1" i="0">
-                <a:solidFill>
-                  <a:srgbClr val="FFFFFF"/>
-                </a:solidFill>
-                <a:latin typeface="Arial"/>
-              </a:rPr>
-              <a:t>2</a:t>
-            </a:r>
-          </a:p>
-        </p:txBody>
-      </p:sp>
-      <p:sp>
-        <p:nvSpPr>
-          <p:cNvPr id="8" name="TextBox 7"/>
+          </a:p>
+        </p:txBody>
+      </p:sp>
+      <p:sp>
+        <p:nvSpPr>
+          <p:cNvPr id="3" name="TextBox 2"/>
           <p:cNvSpPr txBox="1"/>
           <p:nvPr/>
         </p:nvSpPr>
         <p:spPr>
           <a:xfrm>
-            <a:off x="1115568" y="2537460"/>
-            <a:ext cx="10527487" cy="1028699"/>
+            <a:off x="621792" y="274320"/>
+            <a:ext cx="11247120" cy="914400"/>
           </a:xfrm>
           <a:prstGeom prst="rect">
             <a:avLst/>
@@ -12762,55 +12804,91 @@
           </a:bodyPr>
           <a:lstStyle/>
           <a:p>
-            <a:pPr>
-              <a:spcAft>
-                <a:spcPts val="300"/>
-              </a:spcAft>
-            </a:pPr>
-            <a:r>
-              <a:rPr sz="1900" b="1" i="0">
+            <a:r>
+              <a:rPr sz="2800" b="1" i="0">
                 <a:solidFill>
                   <a:srgbClr val="1A1A1A"/>
                 </a:solidFill>
                 <a:latin typeface="Arial"/>
               </a:rPr>
-              <a:t>Re-use rate</a:t>
-            </a:r>
-          </a:p>
+              <a:t>The re-use rate is the one to put in front of the budget authority</a:t>
+            </a:r>
+          </a:p>
+        </p:txBody>
+      </p:sp>
+      <p:sp>
+        <p:nvSpPr>
+          <p:cNvPr id="4" name="TextBox 3"/>
+          <p:cNvSpPr txBox="1"/>
+          <p:nvPr/>
+        </p:nvSpPr>
+        <p:spPr>
+          <a:xfrm>
+            <a:off x="658368" y="1600200"/>
+            <a:ext cx="10881360" cy="2651760"/>
+          </a:xfrm>
+          <a:prstGeom prst="rect">
+            <a:avLst/>
+          </a:prstGeom>
+          <a:noFill/>
+        </p:spPr>
+        <p:txBody>
+          <a:bodyPr wrap="square">
+            <a:spAutoFit/>
+          </a:bodyPr>
+          <a:lstStyle/>
           <a:p>
             <a:pPr>
               <a:spcAft>
-                <a:spcPts val="300"/>
+                <a:spcPts val="1200"/>
               </a:spcAft>
             </a:pPr>
             <a:r>
-              <a:rPr sz="1550" b="0" i="0">
+              <a:rPr sz="2000" b="0" i="0">
                 <a:solidFill>
-                  <a:srgbClr val="595959"/>
+                  <a:srgbClr val="1A1A1A"/>
                 </a:solidFill>
                 <a:latin typeface="Arial"/>
               </a:rPr>
-              <a:t>Of the projects that came through the gate, how many consumed a shared block instead of building their own.</a:t>
-            </a:r>
-          </a:p>
-        </p:txBody>
-      </p:sp>
-      <p:sp>
-        <p:nvSpPr>
-          <p:cNvPr id="9" name="Rectangle 8"/>
+              <a:t>Every project that consumed the shared identity platform instead of building its own is a system the country paid for once instead of many times.</a:t>
+            </a:r>
+          </a:p>
+          <a:p>
+            <a:pPr>
+              <a:spcAft>
+                <a:spcPts val="1200"/>
+              </a:spcAft>
+            </a:pPr>
+            <a:r>
+              <a:rPr sz="2000" b="0" i="0">
+                <a:solidFill>
+                  <a:srgbClr val="1A1A1A"/>
+                </a:solidFill>
+                <a:latin typeface="Arial"/>
+              </a:rPr>
+              <a:t>Tracked over a year, a rising re-use rate is the closest thing you have to proof that the EA is returning its cost — the abstract argument turned into a number that goes up.</a:t>
+            </a:r>
+          </a:p>
+        </p:txBody>
+      </p:sp>
+      <p:sp>
+        <p:nvSpPr>
+          <p:cNvPr id="5" name="Rounded Rectangle 4"/>
           <p:cNvSpPr/>
           <p:nvPr/>
         </p:nvSpPr>
         <p:spPr>
           <a:xfrm>
-            <a:off x="621792" y="3570732"/>
-            <a:ext cx="10881360" cy="12700"/>
-          </a:xfrm>
-          <a:prstGeom prst="rect">
-            <a:avLst/>
+            <a:off x="658368" y="4434840"/>
+            <a:ext cx="10881360" cy="1325880"/>
+          </a:xfrm>
+          <a:prstGeom prst="roundRect">
+            <a:avLst>
+              <a:gd name="adj" fmla="val 4500"/>
+            </a:avLst>
           </a:prstGeom>
           <a:solidFill>
-            <a:srgbClr val="DDECF4"/>
+            <a:srgbClr val="E5F5FB"/>
           </a:solidFill>
           <a:ln>
             <a:noFill/>
@@ -12841,16 +12919,107 @@
       </p:sp>
       <p:sp>
         <p:nvSpPr>
-          <p:cNvPr id="10" name="Oval 9"/>
+          <p:cNvPr id="6" name="TextBox 5"/>
+          <p:cNvSpPr txBox="1"/>
+          <p:nvPr/>
+        </p:nvSpPr>
+        <p:spPr>
+          <a:xfrm>
+            <a:off x="859536" y="4626864"/>
+            <a:ext cx="10479024" cy="1051560"/>
+          </a:xfrm>
+          <a:prstGeom prst="rect">
+            <a:avLst/>
+          </a:prstGeom>
+          <a:noFill/>
+        </p:spPr>
+        <p:txBody>
+          <a:bodyPr wrap="square">
+            <a:spAutoFit/>
+          </a:bodyPr>
+          <a:lstStyle/>
+          <a:p>
+            <a:pPr>
+              <a:spcAft>
+                <a:spcPts val="700"/>
+              </a:spcAft>
+            </a:pPr>
+            <a:r>
+              <a:rPr sz="2300" b="1" i="0">
+                <a:solidFill>
+                  <a:srgbClr val="006E96"/>
+                </a:solidFill>
+                <a:latin typeface="Arial"/>
+              </a:rPr>
+              <a:t>That is the metric that protects your funding.</a:t>
+            </a:r>
+          </a:p>
+        </p:txBody>
+      </p:sp>
+      <p:sp>
+        <p:nvSpPr>
+          <p:cNvPr id="7" name="TextBox 6"/>
+          <p:cNvSpPr txBox="1"/>
+          <p:nvPr/>
+        </p:nvSpPr>
+        <p:spPr>
+          <a:xfrm>
+            <a:off x="457200" y="6473952"/>
+            <a:ext cx="7772400" cy="292608"/>
+          </a:xfrm>
+          <a:prstGeom prst="rect">
+            <a:avLst/>
+          </a:prstGeom>
+          <a:noFill/>
+        </p:spPr>
+        <p:txBody>
+          <a:bodyPr wrap="square">
+            <a:spAutoFit/>
+          </a:bodyPr>
+          <a:lstStyle/>
+          <a:p>
+            <a:r>
+              <a:rPr sz="900" b="0" i="0">
+                <a:solidFill>
+                  <a:srgbClr val="595959"/>
+                </a:solidFill>
+                <a:latin typeface="Arial"/>
+              </a:rPr>
+              <a:t>3.6 · Show the EA is working — the few metrics that matter</a:t>
+            </a:r>
+          </a:p>
+        </p:txBody>
+      </p:sp>
+    </p:spTree>
+  </p:cSld>
+  <p:clrMapOvr>
+    <a:masterClrMapping/>
+  </p:clrMapOvr>
+</p:sld>
+</file>
+
+<file path=ppt/slides/slide50.xml><?xml version="1.0" encoding="utf-8"?>
+<p:sld xmlns:a="http://schemas.openxmlformats.org/drawingml/2006/main" xmlns:p="http://schemas.openxmlformats.org/presentationml/2006/main" xmlns:r="http://schemas.openxmlformats.org/officeDocument/2006/relationships">
+  <p:cSld>
+    <p:spTree>
+      <p:nvGrpSpPr>
+        <p:cNvPr id="1" name=""/>
+        <p:cNvGrpSpPr/>
+        <p:nvPr/>
+      </p:nvGrpSpPr>
+      <p:grpSpPr/>
+      <p:sp>
+        <p:nvSpPr>
+          <p:cNvPr id="2" name="Rectangle 1"/>
           <p:cNvSpPr/>
           <p:nvPr/>
         </p:nvSpPr>
         <p:spPr>
           <a:xfrm>
-            <a:off x="621792" y="3657599"/>
-            <a:ext cx="310896" cy="310896"/>
-          </a:xfrm>
-          <a:prstGeom prst="ellipse">
+            <a:off x="457200" y="384048"/>
+            <a:ext cx="45720" cy="256032"/>
+          </a:xfrm>
+          <a:prstGeom prst="rect">
             <a:avLst/>
           </a:prstGeom>
           <a:solidFill>
@@ -12876,32 +13045,23 @@
           </a:fontRef>
         </p:style>
         <p:txBody>
-          <a:bodyPr rtlCol="0" anchor="ctr" lIns="0" rIns="0" tIns="0" bIns="0" wrap="square"/>
+          <a:bodyPr rtlCol="0" anchor="ctr"/>
           <a:lstStyle/>
           <a:p>
             <a:pPr algn="ctr"/>
-            <a:r>
-              <a:rPr sz="1300" b="1" i="0">
-                <a:solidFill>
-                  <a:srgbClr val="FFFFFF"/>
-                </a:solidFill>
-                <a:latin typeface="Arial"/>
-              </a:rPr>
-              <a:t>3</a:t>
-            </a:r>
-          </a:p>
-        </p:txBody>
-      </p:sp>
-      <p:sp>
-        <p:nvSpPr>
-          <p:cNvPr id="11" name="TextBox 10"/>
+          </a:p>
+        </p:txBody>
+      </p:sp>
+      <p:sp>
+        <p:nvSpPr>
+          <p:cNvPr id="3" name="TextBox 2"/>
           <p:cNvSpPr txBox="1"/>
           <p:nvPr/>
         </p:nvSpPr>
         <p:spPr>
           <a:xfrm>
-            <a:off x="1115568" y="3611879"/>
-            <a:ext cx="10527487" cy="1028699"/>
+            <a:off x="621792" y="274320"/>
+            <a:ext cx="11247120" cy="914400"/>
           </a:xfrm>
           <a:prstGeom prst="rect">
             <a:avLst/>
@@ -12914,55 +13074,36 @@
           </a:bodyPr>
           <a:lstStyle/>
           <a:p>
-            <a:pPr>
-              <a:spcAft>
-                <a:spcPts val="300"/>
-              </a:spcAft>
-            </a:pPr>
-            <a:r>
-              <a:rPr sz="1900" b="1" i="0">
+            <a:r>
+              <a:rPr sz="2800" b="1" i="0">
                 <a:solidFill>
                   <a:srgbClr val="1A1A1A"/>
                 </a:solidFill>
                 <a:latin typeface="Arial"/>
               </a:rPr>
-              <a:t>Open exceptions</a:t>
-            </a:r>
-          </a:p>
-          <a:p>
-            <a:pPr>
-              <a:spcAft>
-                <a:spcPts val="300"/>
-              </a:spcAft>
-            </a:pPr>
-            <a:r>
-              <a:rPr sz="1550" b="0" i="0">
-                <a:solidFill>
-                  <a:srgbClr val="595959"/>
-                </a:solidFill>
-                <a:latin typeface="Arial"/>
-              </a:rPr>
-              <a:t>How many waivers are outstanding, and how old.</a:t>
-            </a:r>
-          </a:p>
-        </p:txBody>
-      </p:sp>
-      <p:sp>
-        <p:nvSpPr>
-          <p:cNvPr id="12" name="Rectangle 11"/>
+              <a:t>If a metric would still rise while the architecture stopped mattering, it is wrong</a:t>
+            </a:r>
+          </a:p>
+        </p:txBody>
+      </p:sp>
+      <p:sp>
+        <p:nvSpPr>
+          <p:cNvPr id="4" name="Rounded Rectangle 3"/>
           <p:cNvSpPr/>
           <p:nvPr/>
         </p:nvSpPr>
         <p:spPr>
           <a:xfrm>
-            <a:off x="621792" y="4645152"/>
-            <a:ext cx="10881360" cy="12700"/>
-          </a:xfrm>
-          <a:prstGeom prst="rect">
-            <a:avLst/>
+            <a:off x="658368" y="1554480"/>
+            <a:ext cx="5394960" cy="3977639"/>
+          </a:xfrm>
+          <a:prstGeom prst="roundRect">
+            <a:avLst>
+              <a:gd name="adj" fmla="val 4500"/>
+            </a:avLst>
           </a:prstGeom>
           <a:solidFill>
-            <a:srgbClr val="DDECF4"/>
+            <a:srgbClr val="E5F5FB"/>
           </a:solidFill>
           <a:ln>
             <a:noFill/>
@@ -12993,20 +13134,109 @@
       </p:sp>
       <p:sp>
         <p:nvSpPr>
-          <p:cNvPr id="13" name="Oval 12"/>
+          <p:cNvPr id="5" name="TextBox 4"/>
+          <p:cNvSpPr txBox="1"/>
+          <p:nvPr/>
+        </p:nvSpPr>
+        <p:spPr>
+          <a:xfrm>
+            <a:off x="859536" y="1700784"/>
+            <a:ext cx="4992624" cy="3703320"/>
+          </a:xfrm>
+          <a:prstGeom prst="rect">
+            <a:avLst/>
+          </a:prstGeom>
+          <a:noFill/>
+        </p:spPr>
+        <p:txBody>
+          <a:bodyPr wrap="square">
+            <a:spAutoFit/>
+          </a:bodyPr>
+          <a:lstStyle/>
+          <a:p>
+            <a:pPr>
+              <a:spcAft>
+                <a:spcPts val="700"/>
+              </a:spcAft>
+            </a:pPr>
+            <a:r>
+              <a:rPr sz="1900" b="1" i="0">
+                <a:solidFill>
+                  <a:srgbClr val="006E96"/>
+                </a:solidFill>
+                <a:latin typeface="Arial"/>
+              </a:rPr>
+              <a:t>MEASURES EFFECT</a:t>
+            </a:r>
+          </a:p>
+          <a:p>
+            <a:pPr>
+              <a:spcAft>
+                <a:spcPts val="700"/>
+              </a:spcAft>
+            </a:pPr>
+            <a:r>
+              <a:rPr sz="1600" b="0" i="0">
+                <a:solidFill>
+                  <a:srgbClr val="1A1A1A"/>
+                </a:solidFill>
+                <a:latin typeface="Arial"/>
+              </a:rPr>
+              <a:t>Re-use rate.</a:t>
+            </a:r>
+          </a:p>
+          <a:p>
+            <a:pPr>
+              <a:spcAft>
+                <a:spcPts val="700"/>
+              </a:spcAft>
+            </a:pPr>
+            <a:r>
+              <a:rPr sz="1600" b="0" i="0">
+                <a:solidFill>
+                  <a:srgbClr val="1A1A1A"/>
+                </a:solidFill>
+                <a:latin typeface="Arial"/>
+              </a:rPr>
+              <a:t>Coverage that is current.</a:t>
+            </a:r>
+          </a:p>
+          <a:p>
+            <a:pPr>
+              <a:spcAft>
+                <a:spcPts val="700"/>
+              </a:spcAft>
+            </a:pPr>
+            <a:r>
+              <a:rPr sz="1600" b="0" i="0">
+                <a:solidFill>
+                  <a:srgbClr val="1A1A1A"/>
+                </a:solidFill>
+                <a:latin typeface="Arial"/>
+              </a:rPr>
+              <a:t>Gate decisions made, and how fast.</a:t>
+            </a:r>
+          </a:p>
+        </p:txBody>
+      </p:sp>
+      <p:sp>
+        <p:nvSpPr>
+          <p:cNvPr id="6" name="Rounded Rectangle 5"/>
           <p:cNvSpPr/>
           <p:nvPr/>
         </p:nvSpPr>
         <p:spPr>
           <a:xfrm>
-            <a:off x="621792" y="4732020"/>
-            <a:ext cx="310896" cy="310896"/>
-          </a:xfrm>
-          <a:prstGeom prst="ellipse">
-            <a:avLst/>
+            <a:off x="6263640" y="1554480"/>
+            <a:ext cx="5394960" cy="3977639"/>
+          </a:xfrm>
+          <a:prstGeom prst="roundRect">
+            <a:avLst>
+              <a:gd name="adj" fmla="val 4500"/>
+            </a:avLst>
           </a:prstGeom>
           <a:solidFill>
-            <a:srgbClr val="009CD6"/>
+            <a:srgbClr val="F2F2F2"/>
           </a:solidFill>
           <a:ln>
             <a:noFill/>
@@ -13028,32 +13258,23 @@
           </a:fontRef>
         </p:style>
         <p:txBody>
-          <a:bodyPr rtlCol="0" anchor="ctr" lIns="0" rIns="0" tIns="0" bIns="0" wrap="square"/>
+          <a:bodyPr rtlCol="0" anchor="ctr"/>
           <a:lstStyle/>
           <a:p>
             <a:pPr algn="ctr"/>
-            <a:r>
-              <a:rPr sz="1300" b="1" i="0">
-                <a:solidFill>
-                  <a:srgbClr val="FFFFFF"/>
-                </a:solidFill>
-                <a:latin typeface="Arial"/>
-              </a:rPr>
-              <a:t>4</a:t>
-            </a:r>
-          </a:p>
-        </p:txBody>
-      </p:sp>
-      <p:sp>
-        <p:nvSpPr>
-          <p:cNvPr id="14" name="TextBox 13"/>
+          </a:p>
+        </p:txBody>
+      </p:sp>
+      <p:sp>
+        <p:nvSpPr>
+          <p:cNvPr id="7" name="TextBox 6"/>
           <p:cNvSpPr txBox="1"/>
           <p:nvPr/>
         </p:nvSpPr>
         <p:spPr>
           <a:xfrm>
-            <a:off x="1115568" y="4686300"/>
-            <a:ext cx="10527487" cy="1028699"/>
+            <a:off x="6464808" y="1700784"/>
+            <a:ext cx="4992624" cy="3703320"/>
           </a:xfrm>
           <a:prstGeom prst="rect">
             <a:avLst/>
@@ -13068,46 +13289,78 @@
           <a:p>
             <a:pPr>
               <a:spcAft>
-                <a:spcPts val="300"/>
+                <a:spcPts val="700"/>
               </a:spcAft>
             </a:pPr>
             <a:r>
               <a:rPr sz="1900" b="1" i="0">
+                <a:solidFill>
+                  <a:srgbClr val="006E96"/>
+                </a:solidFill>
+                <a:latin typeface="Arial"/>
+              </a:rPr>
+              <a:t>MEASURES ACTIVITY</a:t>
+            </a:r>
+          </a:p>
+          <a:p>
+            <a:pPr>
+              <a:spcAft>
+                <a:spcPts val="700"/>
+              </a:spcAft>
+            </a:pPr>
+            <a:r>
+              <a:rPr sz="1600" b="0" i="0">
                 <a:solidFill>
                   <a:srgbClr val="1A1A1A"/>
                 </a:solidFill>
                 <a:latin typeface="Arial"/>
               </a:rPr>
-              <a:t>Decisions</a:t>
+              <a:t>Diagrams drawn.</a:t>
             </a:r>
           </a:p>
           <a:p>
             <a:pPr>
               <a:spcAft>
-                <a:spcPts val="300"/>
+                <a:spcPts val="700"/>
               </a:spcAft>
             </a:pPr>
             <a:r>
-              <a:rPr sz="1550" b="0" i="0">
+              <a:rPr sz="1600" b="0" i="0">
                 <a:solidFill>
-                  <a:srgbClr val="595959"/>
+                  <a:srgbClr val="1A1A1A"/>
                 </a:solidFill>
                 <a:latin typeface="Arial"/>
               </a:rPr>
-              <a:t>How many gate decisions the Board made — and how fast.</a:t>
-            </a:r>
-          </a:p>
-        </p:txBody>
-      </p:sp>
-      <p:sp>
-        <p:nvSpPr>
-          <p:cNvPr id="15" name="TextBox 14"/>
+              <a:t>Pages written.</a:t>
+            </a:r>
+          </a:p>
+          <a:p>
+            <a:pPr>
+              <a:spcAft>
+                <a:spcPts val="700"/>
+              </a:spcAft>
+            </a:pPr>
+            <a:r>
+              <a:rPr sz="1600" b="0" i="0">
+                <a:solidFill>
+                  <a:srgbClr val="1A1A1A"/>
+                </a:solidFill>
+                <a:latin typeface="Arial"/>
+              </a:rPr>
+              <a:t>Meetings held.</a:t>
+            </a:r>
+          </a:p>
+        </p:txBody>
+      </p:sp>
+      <p:sp>
+        <p:nvSpPr>
+          <p:cNvPr id="8" name="TextBox 7"/>
           <p:cNvSpPr txBox="1"/>
           <p:nvPr/>
         </p:nvSpPr>
         <p:spPr>
           <a:xfrm>
-            <a:off x="658368" y="5870448"/>
+            <a:off x="658368" y="5715000"/>
             <a:ext cx="10881360" cy="548640"/>
           </a:xfrm>
           <a:prstGeom prst="rect">
@@ -13128,14 +13381,14 @@
                 </a:solidFill>
                 <a:latin typeface="Arial"/>
               </a:rPr>
-              <a:t>A growing pile of aged exceptions is fragmentation returning; a slow gate is one projects route around.</a:t>
-            </a:r>
-          </a:p>
-        </p:txBody>
-      </p:sp>
-      <p:sp>
-        <p:nvSpPr>
-          <p:cNvPr id="16" name="TextBox 15"/>
+              <a:t>A programme can produce a thousand pages and change nothing.</a:t>
+            </a:r>
+          </a:p>
+        </p:txBody>
+      </p:sp>
+      <p:sp>
+        <p:nvSpPr>
+          <p:cNvPr id="9" name="TextBox 8"/>
           <p:cNvSpPr txBox="1"/>
           <p:nvPr/>
         </p:nvSpPr>
@@ -13175,7 +13428,7 @@
 </p:sld>
 </file>
 
-<file path=ppt/slides/slide43.xml><?xml version="1.0" encoding="utf-8"?>
+<file path=ppt/slides/slide51.xml><?xml version="1.0" encoding="utf-8"?>
 <p:sld xmlns:a="http://schemas.openxmlformats.org/drawingml/2006/main" xmlns:p="http://schemas.openxmlformats.org/presentationml/2006/main" xmlns:r="http://schemas.openxmlformats.org/officeDocument/2006/relationships">
   <p:cSld>
     <p:spTree>
@@ -13258,7 +13511,7 @@
                 </a:solidFill>
                 <a:latin typeface="Arial"/>
               </a:rPr>
-              <a:t>The re-use rate is the one to put in front of the budget authority</a:t>
+              <a:t>A scorecard that is always green is believed once</a:t>
             </a:r>
           </a:p>
         </p:txBody>
@@ -13297,7 +13550,7 @@
                 </a:solidFill>
                 <a:latin typeface="Arial"/>
               </a:rPr>
-              <a:t>Every project that consumed the shared identity platform instead of building its own is a system the country paid for once instead of many times.</a:t>
+              <a:t>One page, every quarter, to the Board and the minister — including what is not working: the coverage gap in a sector nobody will let you near, the aging exceptions a powerful ministry will not close.</a:t>
             </a:r>
           </a:p>
           <a:p>
@@ -13313,7 +13566,7 @@
                 </a:solidFill>
                 <a:latin typeface="Arial"/>
               </a:rPr>
-              <a:t>Tracked over a year, a rising re-use rate is the closest thing you have to proof that the EA is returning its cost — the abstract argument turned into a number that goes up.</a:t>
+              <a:t>The temptation is to show only green. Resist it.</a:t>
             </a:r>
           </a:p>
         </p:txBody>
@@ -13398,7 +13651,7 @@
                 </a:solidFill>
                 <a:latin typeface="Arial"/>
               </a:rPr>
-              <a:t>That is the metric that protects your funding.</a:t>
+              <a:t>A scorecard honestly amber where it should be is what keeps the EA funded across a change of minister.</a:t>
             </a:r>
           </a:p>
         </p:txBody>
@@ -13445,7 +13698,7 @@
 </p:sld>
 </file>
 
-<file path=ppt/slides/slide44.xml><?xml version="1.0" encoding="utf-8"?>
+<file path=ppt/slides/slide52.xml><?xml version="1.0" encoding="utf-8"?>
 <p:sld xmlns:a="http://schemas.openxmlformats.org/drawingml/2006/main" xmlns:p="http://schemas.openxmlformats.org/presentationml/2006/main" xmlns:r="http://schemas.openxmlformats.org/officeDocument/2006/relationships">
   <p:cSld>
     <p:spTree>
@@ -13457,23 +13710,95 @@
       <p:grpSpPr/>
       <p:sp>
         <p:nvSpPr>
-          <p:cNvPr id="2" name="Rectangle 1"/>
-          <p:cNvSpPr/>
+          <p:cNvPr id="2" name="TextBox 1"/>
+          <p:cNvSpPr txBox="1"/>
           <p:nvPr/>
         </p:nvSpPr>
         <p:spPr>
           <a:xfrm>
-            <a:off x="457200" y="384048"/>
-            <a:ext cx="45720" cy="256032"/>
+            <a:off x="1005840" y="2103120"/>
+            <a:ext cx="10149840" cy="2377440"/>
           </a:xfrm>
           <a:prstGeom prst="rect">
             <a:avLst/>
           </a:prstGeom>
+          <a:noFill/>
+        </p:spPr>
+        <p:txBody>
+          <a:bodyPr wrap="square">
+            <a:spAutoFit/>
+          </a:bodyPr>
+          <a:lstStyle/>
+          <a:p>
+            <a:r>
+              <a:rPr sz="3000" b="1" i="0">
+                <a:solidFill>
+                  <a:srgbClr val="1A1A1A"/>
+                </a:solidFill>
+                <a:latin typeface="Arial"/>
+              </a:rPr>
+              <a:t>A one-page quarterly scorecard — coverage, re-use rate, open exceptions, decisions — shows honestly whether the EA is working, and the re-use rate is what proves it pays.</a:t>
+            </a:r>
+          </a:p>
+        </p:txBody>
+      </p:sp>
+      <p:sp>
+        <p:nvSpPr>
+          <p:cNvPr id="3" name="TextBox 2"/>
+          <p:cNvSpPr txBox="1"/>
+          <p:nvPr/>
+        </p:nvSpPr>
+        <p:spPr>
+          <a:xfrm>
+            <a:off x="1005840" y="1554480"/>
+            <a:ext cx="5486400" cy="365760"/>
+          </a:xfrm>
+          <a:prstGeom prst="rect">
+            <a:avLst/>
+          </a:prstGeom>
+          <a:noFill/>
+        </p:spPr>
+        <p:txBody>
+          <a:bodyPr wrap="square">
+            <a:spAutoFit/>
+          </a:bodyPr>
+          <a:lstStyle/>
+          <a:p>
+            <a:r>
+              <a:rPr sz="1200" b="1" i="0">
+                <a:solidFill>
+                  <a:srgbClr val="006E96"/>
+                </a:solidFill>
+                <a:latin typeface="Arial"/>
+              </a:rPr>
+              <a:t>IN ONE SENTENCE</a:t>
+            </a:r>
+          </a:p>
+        </p:txBody>
+      </p:sp>
+      <p:sp>
+        <p:nvSpPr>
+          <p:cNvPr id="4" name="Rounded Rectangle 3"/>
+          <p:cNvSpPr/>
+          <p:nvPr/>
+        </p:nvSpPr>
+        <p:spPr>
+          <a:xfrm>
+            <a:off x="658368" y="4709160"/>
+            <a:ext cx="10881360" cy="1554480"/>
+          </a:xfrm>
+          <a:prstGeom prst="roundRect">
+            <a:avLst>
+              <a:gd name="adj" fmla="val 4500"/>
+            </a:avLst>
+          </a:prstGeom>
           <a:solidFill>
-            <a:srgbClr val="009CD6"/>
+            <a:srgbClr val="FFFFFF"/>
           </a:solidFill>
-          <a:ln>
-            <a:noFill/>
+          <a:ln w="9525">
+            <a:solidFill>
+              <a:srgbClr val="009CD6"/>
+            </a:solidFill>
           </a:ln>
           <a:effectLst/>
         </p:spPr>
@@ -13492,350 +13817,56 @@
           </a:fontRef>
         </p:style>
         <p:txBody>
-          <a:bodyPr rtlCol="0" anchor="ctr"/>
-          <a:lstStyle/>
-          <a:p>
-            <a:pPr algn="ctr"/>
-          </a:p>
-        </p:txBody>
-      </p:sp>
-      <p:sp>
-        <p:nvSpPr>
-          <p:cNvPr id="3" name="TextBox 2"/>
-          <p:cNvSpPr txBox="1"/>
-          <p:nvPr/>
-        </p:nvSpPr>
-        <p:spPr>
-          <a:xfrm>
-            <a:off x="621792" y="274320"/>
-            <a:ext cx="11247120" cy="914400"/>
-          </a:xfrm>
-          <a:prstGeom prst="rect">
-            <a:avLst/>
-          </a:prstGeom>
-          <a:noFill/>
-        </p:spPr>
-        <p:txBody>
-          <a:bodyPr wrap="square">
-            <a:spAutoFit/>
+          <a:bodyPr rtlCol="0" anchor="ctr" wrap="square" lIns="228600" rIns="228600" tIns="109728" bIns="109728">
+            <a:noAutofit/>
           </a:bodyPr>
           <a:lstStyle/>
           <a:p>
-            <a:r>
-              <a:rPr sz="2800" b="1" i="0">
+            <a:pPr algn="l">
+              <a:spcAft>
+                <a:spcPts val="400"/>
+              </a:spcAft>
+            </a:pPr>
+            <a:r>
+              <a:rPr sz="1800" b="1" i="0">
+                <a:solidFill>
+                  <a:srgbClr val="006E96"/>
+                </a:solidFill>
+                <a:latin typeface="Arial"/>
+              </a:rPr>
+              <a:t>Do this on your own sector. </a:t>
+            </a:r>
+            <a:r>
+              <a:rPr sz="1800" b="1" i="0">
                 <a:solidFill>
                   <a:srgbClr val="1A1A1A"/>
                 </a:solidFill>
                 <a:latin typeface="Arial"/>
               </a:rPr>
-              <a:t>If a metric would still rise while the architecture stopped mattering, it is wrong</a:t>
-            </a:r>
-          </a:p>
-        </p:txBody>
-      </p:sp>
-      <p:sp>
-        <p:nvSpPr>
-          <p:cNvPr id="4" name="Rounded Rectangle 3"/>
-          <p:cNvSpPr/>
-          <p:nvPr/>
-        </p:nvSpPr>
-        <p:spPr>
-          <a:xfrm>
-            <a:off x="658368" y="1554480"/>
-            <a:ext cx="5394960" cy="3977639"/>
-          </a:xfrm>
-          <a:prstGeom prst="roundRect">
-            <a:avLst>
-              <a:gd name="adj" fmla="val 4500"/>
-            </a:avLst>
-          </a:prstGeom>
-          <a:solidFill>
-            <a:srgbClr val="E5F5FB"/>
-          </a:solidFill>
-          <a:ln>
-            <a:noFill/>
-          </a:ln>
-          <a:effectLst/>
-        </p:spPr>
-        <p:style>
-          <a:lnRef idx="1">
-            <a:schemeClr val="accent1"/>
-          </a:lnRef>
-          <a:fillRef idx="3">
-            <a:schemeClr val="accent1"/>
-          </a:fillRef>
-          <a:effectRef idx="2">
-            <a:schemeClr val="accent1"/>
-          </a:effectRef>
-          <a:fontRef idx="minor">
-            <a:schemeClr val="lt1"/>
-          </a:fontRef>
-        </p:style>
-        <p:txBody>
-          <a:bodyPr rtlCol="0" anchor="ctr"/>
-          <a:lstStyle/>
-          <a:p>
-            <a:pPr algn="ctr"/>
-          </a:p>
-        </p:txBody>
-      </p:sp>
-      <p:sp>
-        <p:nvSpPr>
-          <p:cNvPr id="5" name="TextBox 4"/>
-          <p:cNvSpPr txBox="1"/>
-          <p:nvPr/>
-        </p:nvSpPr>
-        <p:spPr>
-          <a:xfrm>
-            <a:off x="859536" y="1700784"/>
-            <a:ext cx="4992624" cy="3703320"/>
-          </a:xfrm>
-          <a:prstGeom prst="rect">
-            <a:avLst/>
-          </a:prstGeom>
-          <a:noFill/>
-        </p:spPr>
-        <p:txBody>
-          <a:bodyPr wrap="square">
-            <a:spAutoFit/>
-          </a:bodyPr>
-          <a:lstStyle/>
-          <a:p>
-            <a:pPr>
+              <a:t>Build your EA health scorecard.</a:t>
+            </a:r>
+          </a:p>
+          <a:p>
+            <a:pPr algn="l">
               <a:spcAft>
-                <a:spcPts val="700"/>
+                <a:spcPts val="400"/>
               </a:spcAft>
             </a:pPr>
             <a:r>
-              <a:rPr sz="1900" b="1" i="0">
+              <a:rPr sz="1800" b="0" i="0">
                 <a:solidFill>
-                  <a:srgbClr val="006E96"/>
+                  <a:srgbClr val="595959"/>
                 </a:solidFill>
                 <a:latin typeface="Arial"/>
               </a:rPr>
-              <a:t>MEASURES EFFECT</a:t>
-            </a:r>
-          </a:p>
-          <a:p>
-            <a:pPr>
-              <a:spcAft>
-                <a:spcPts val="700"/>
-              </a:spcAft>
-            </a:pPr>
-            <a:r>
-              <a:rPr sz="1600" b="0" i="0">
-                <a:solidFill>
-                  <a:srgbClr val="1A1A1A"/>
-                </a:solidFill>
-                <a:latin typeface="Arial"/>
-              </a:rPr>
-              <a:t>Re-use rate.</a:t>
-            </a:r>
-          </a:p>
-          <a:p>
-            <a:pPr>
-              <a:spcAft>
-                <a:spcPts val="700"/>
-              </a:spcAft>
-            </a:pPr>
-            <a:r>
-              <a:rPr sz="1600" b="0" i="0">
-                <a:solidFill>
-                  <a:srgbClr val="1A1A1A"/>
-                </a:solidFill>
-                <a:latin typeface="Arial"/>
-              </a:rPr>
-              <a:t>Coverage that is current.</a:t>
-            </a:r>
-          </a:p>
-          <a:p>
-            <a:pPr>
-              <a:spcAft>
-                <a:spcPts val="700"/>
-              </a:spcAft>
-            </a:pPr>
-            <a:r>
-              <a:rPr sz="1600" b="0" i="0">
-                <a:solidFill>
-                  <a:srgbClr val="1A1A1A"/>
-                </a:solidFill>
-                <a:latin typeface="Arial"/>
-              </a:rPr>
-              <a:t>Gate decisions made, and how fast.</a:t>
-            </a:r>
-          </a:p>
-        </p:txBody>
-      </p:sp>
-      <p:sp>
-        <p:nvSpPr>
-          <p:cNvPr id="6" name="Rounded Rectangle 5"/>
-          <p:cNvSpPr/>
-          <p:nvPr/>
-        </p:nvSpPr>
-        <p:spPr>
-          <a:xfrm>
-            <a:off x="6263640" y="1554480"/>
-            <a:ext cx="5394960" cy="3977639"/>
-          </a:xfrm>
-          <a:prstGeom prst="roundRect">
-            <a:avLst>
-              <a:gd name="adj" fmla="val 4500"/>
-            </a:avLst>
-          </a:prstGeom>
-          <a:solidFill>
-            <a:srgbClr val="F2F2F2"/>
-          </a:solidFill>
-          <a:ln>
-            <a:noFill/>
-          </a:ln>
-          <a:effectLst/>
-        </p:spPr>
-        <p:style>
-          <a:lnRef idx="1">
-            <a:schemeClr val="accent1"/>
-          </a:lnRef>
-          <a:fillRef idx="3">
-            <a:schemeClr val="accent1"/>
-          </a:fillRef>
-          <a:effectRef idx="2">
-            <a:schemeClr val="accent1"/>
-          </a:effectRef>
-          <a:fontRef idx="minor">
-            <a:schemeClr val="lt1"/>
-          </a:fontRef>
-        </p:style>
-        <p:txBody>
-          <a:bodyPr rtlCol="0" anchor="ctr"/>
-          <a:lstStyle/>
-          <a:p>
-            <a:pPr algn="ctr"/>
-          </a:p>
-        </p:txBody>
-      </p:sp>
-      <p:sp>
-        <p:nvSpPr>
-          <p:cNvPr id="7" name="TextBox 6"/>
-          <p:cNvSpPr txBox="1"/>
-          <p:nvPr/>
-        </p:nvSpPr>
-        <p:spPr>
-          <a:xfrm>
-            <a:off x="6464808" y="1700784"/>
-            <a:ext cx="4992624" cy="3703320"/>
-          </a:xfrm>
-          <a:prstGeom prst="rect">
-            <a:avLst/>
-          </a:prstGeom>
-          <a:noFill/>
-        </p:spPr>
-        <p:txBody>
-          <a:bodyPr wrap="square">
-            <a:spAutoFit/>
-          </a:bodyPr>
-          <a:lstStyle/>
-          <a:p>
-            <a:pPr>
-              <a:spcAft>
-                <a:spcPts val="700"/>
-              </a:spcAft>
-            </a:pPr>
-            <a:r>
-              <a:rPr sz="1900" b="1" i="0">
-                <a:solidFill>
-                  <a:srgbClr val="006E96"/>
-                </a:solidFill>
-                <a:latin typeface="Arial"/>
-              </a:rPr>
-              <a:t>MEASURES ACTIVITY</a:t>
-            </a:r>
-          </a:p>
-          <a:p>
-            <a:pPr>
-              <a:spcAft>
-                <a:spcPts val="700"/>
-              </a:spcAft>
-            </a:pPr>
-            <a:r>
-              <a:rPr sz="1600" b="0" i="0">
-                <a:solidFill>
-                  <a:srgbClr val="1A1A1A"/>
-                </a:solidFill>
-                <a:latin typeface="Arial"/>
-              </a:rPr>
-              <a:t>Diagrams drawn.</a:t>
-            </a:r>
-          </a:p>
-          <a:p>
-            <a:pPr>
-              <a:spcAft>
-                <a:spcPts val="700"/>
-              </a:spcAft>
-            </a:pPr>
-            <a:r>
-              <a:rPr sz="1600" b="0" i="0">
-                <a:solidFill>
-                  <a:srgbClr val="1A1A1A"/>
-                </a:solidFill>
-                <a:latin typeface="Arial"/>
-              </a:rPr>
-              <a:t>Pages written.</a:t>
-            </a:r>
-          </a:p>
-          <a:p>
-            <a:pPr>
-              <a:spcAft>
-                <a:spcPts val="700"/>
-              </a:spcAft>
-            </a:pPr>
-            <a:r>
-              <a:rPr sz="1600" b="0" i="0">
-                <a:solidFill>
-                  <a:srgbClr val="1A1A1A"/>
-                </a:solidFill>
-                <a:latin typeface="Arial"/>
-              </a:rPr>
-              <a:t>Meetings held.</a:t>
-            </a:r>
-          </a:p>
-        </p:txBody>
-      </p:sp>
-      <p:sp>
-        <p:nvSpPr>
-          <p:cNvPr id="8" name="TextBox 7"/>
-          <p:cNvSpPr txBox="1"/>
-          <p:nvPr/>
-        </p:nvSpPr>
-        <p:spPr>
-          <a:xfrm>
-            <a:off x="658368" y="5715000"/>
-            <a:ext cx="10881360" cy="548640"/>
-          </a:xfrm>
-          <a:prstGeom prst="rect">
-            <a:avLst/>
-          </a:prstGeom>
-          <a:noFill/>
-        </p:spPr>
-        <p:txBody>
-          <a:bodyPr wrap="square">
-            <a:spAutoFit/>
-          </a:bodyPr>
-          <a:lstStyle/>
-          <a:p>
-            <a:r>
-              <a:rPr sz="1550" b="1" i="0">
-                <a:solidFill>
-                  <a:srgbClr val="006E96"/>
-                </a:solidFill>
-                <a:latin typeface="Arial"/>
-              </a:rPr>
-              <a:t>A programme can produce a thousand pages and change nothing.</a:t>
-            </a:r>
-          </a:p>
-        </p:txBody>
-      </p:sp>
-      <p:sp>
-        <p:nvSpPr>
-          <p:cNvPr id="9" name="TextBox 8"/>
+              <a:t>The prompt in the companion material gives you a one-page scorecard template with metrics, computations and thresholds. Before the next video.</a:t>
+            </a:r>
+          </a:p>
+        </p:txBody>
+      </p:sp>
+      <p:sp>
+        <p:nvSpPr>
+          <p:cNvPr id="5" name="TextBox 4"/>
           <p:cNvSpPr txBox="1"/>
           <p:nvPr/>
         </p:nvSpPr>
@@ -13863,6 +13894,41 @@
                 <a:latin typeface="Arial"/>
               </a:rPr>
               <a:t>3.6 · Show the EA is working — the few metrics that matter</a:t>
+            </a:r>
+          </a:p>
+        </p:txBody>
+      </p:sp>
+      <p:sp>
+        <p:nvSpPr>
+          <p:cNvPr id="6" name="TextBox 5"/>
+          <p:cNvSpPr txBox="1"/>
+          <p:nvPr/>
+        </p:nvSpPr>
+        <p:spPr>
+          <a:xfrm>
+            <a:off x="10058400" y="6473952"/>
+            <a:ext cx="1673352" cy="292608"/>
+          </a:xfrm>
+          <a:prstGeom prst="rect">
+            <a:avLst/>
+          </a:prstGeom>
+          <a:noFill/>
+        </p:spPr>
+        <p:txBody>
+          <a:bodyPr wrap="square">
+            <a:spAutoFit/>
+          </a:bodyPr>
+          <a:lstStyle/>
+          <a:p>
+            <a:pPr algn="r"/>
+            <a:r>
+              <a:rPr sz="900" b="0" i="0">
+                <a:solidFill>
+                  <a:srgbClr val="595959"/>
+                </a:solidFill>
+                <a:latin typeface="Arial"/>
+              </a:rPr>
+              <a:t>www.itu.int</a:t>
             </a:r>
           </a:p>
         </p:txBody>
@@ -13875,520 +13941,7 @@
 </p:sld>
 </file>
 
-<file path=ppt/slides/slide45.xml><?xml version="1.0" encoding="utf-8"?>
-<p:sld xmlns:a="http://schemas.openxmlformats.org/drawingml/2006/main" xmlns:p="http://schemas.openxmlformats.org/presentationml/2006/main" xmlns:r="http://schemas.openxmlformats.org/officeDocument/2006/relationships">
-  <p:cSld>
-    <p:spTree>
-      <p:nvGrpSpPr>
-        <p:cNvPr id="1" name=""/>
-        <p:cNvGrpSpPr/>
-        <p:nvPr/>
-      </p:nvGrpSpPr>
-      <p:grpSpPr/>
-      <p:sp>
-        <p:nvSpPr>
-          <p:cNvPr id="2" name="Rectangle 1"/>
-          <p:cNvSpPr/>
-          <p:nvPr/>
-        </p:nvSpPr>
-        <p:spPr>
-          <a:xfrm>
-            <a:off x="457200" y="384048"/>
-            <a:ext cx="45720" cy="256032"/>
-          </a:xfrm>
-          <a:prstGeom prst="rect">
-            <a:avLst/>
-          </a:prstGeom>
-          <a:solidFill>
-            <a:srgbClr val="009CD6"/>
-          </a:solidFill>
-          <a:ln>
-            <a:noFill/>
-          </a:ln>
-          <a:effectLst/>
-        </p:spPr>
-        <p:style>
-          <a:lnRef idx="1">
-            <a:schemeClr val="accent1"/>
-          </a:lnRef>
-          <a:fillRef idx="3">
-            <a:schemeClr val="accent1"/>
-          </a:fillRef>
-          <a:effectRef idx="2">
-            <a:schemeClr val="accent1"/>
-          </a:effectRef>
-          <a:fontRef idx="minor">
-            <a:schemeClr val="lt1"/>
-          </a:fontRef>
-        </p:style>
-        <p:txBody>
-          <a:bodyPr rtlCol="0" anchor="ctr"/>
-          <a:lstStyle/>
-          <a:p>
-            <a:pPr algn="ctr"/>
-          </a:p>
-        </p:txBody>
-      </p:sp>
-      <p:sp>
-        <p:nvSpPr>
-          <p:cNvPr id="3" name="TextBox 2"/>
-          <p:cNvSpPr txBox="1"/>
-          <p:nvPr/>
-        </p:nvSpPr>
-        <p:spPr>
-          <a:xfrm>
-            <a:off x="621792" y="274320"/>
-            <a:ext cx="11247120" cy="914400"/>
-          </a:xfrm>
-          <a:prstGeom prst="rect">
-            <a:avLst/>
-          </a:prstGeom>
-          <a:noFill/>
-        </p:spPr>
-        <p:txBody>
-          <a:bodyPr wrap="square">
-            <a:spAutoFit/>
-          </a:bodyPr>
-          <a:lstStyle/>
-          <a:p>
-            <a:r>
-              <a:rPr sz="2800" b="1" i="0">
-                <a:solidFill>
-                  <a:srgbClr val="1A1A1A"/>
-                </a:solidFill>
-                <a:latin typeface="Arial"/>
-              </a:rPr>
-              <a:t>A scorecard that is always green is believed once</a:t>
-            </a:r>
-          </a:p>
-        </p:txBody>
-      </p:sp>
-      <p:sp>
-        <p:nvSpPr>
-          <p:cNvPr id="4" name="TextBox 3"/>
-          <p:cNvSpPr txBox="1"/>
-          <p:nvPr/>
-        </p:nvSpPr>
-        <p:spPr>
-          <a:xfrm>
-            <a:off x="658368" y="1600200"/>
-            <a:ext cx="10881360" cy="2651760"/>
-          </a:xfrm>
-          <a:prstGeom prst="rect">
-            <a:avLst/>
-          </a:prstGeom>
-          <a:noFill/>
-        </p:spPr>
-        <p:txBody>
-          <a:bodyPr wrap="square">
-            <a:spAutoFit/>
-          </a:bodyPr>
-          <a:lstStyle/>
-          <a:p>
-            <a:pPr>
-              <a:spcAft>
-                <a:spcPts val="1200"/>
-              </a:spcAft>
-            </a:pPr>
-            <a:r>
-              <a:rPr sz="2000" b="0" i="0">
-                <a:solidFill>
-                  <a:srgbClr val="1A1A1A"/>
-                </a:solidFill>
-                <a:latin typeface="Arial"/>
-              </a:rPr>
-              <a:t>One page, every quarter, to the Board and the minister — including what is not working: the coverage gap in a sector nobody will let you near, the aging exceptions a powerful ministry will not close.</a:t>
-            </a:r>
-          </a:p>
-          <a:p>
-            <a:pPr>
-              <a:spcAft>
-                <a:spcPts val="1200"/>
-              </a:spcAft>
-            </a:pPr>
-            <a:r>
-              <a:rPr sz="2000" b="0" i="0">
-                <a:solidFill>
-                  <a:srgbClr val="1A1A1A"/>
-                </a:solidFill>
-                <a:latin typeface="Arial"/>
-              </a:rPr>
-              <a:t>The temptation is to show only green. Resist it.</a:t>
-            </a:r>
-          </a:p>
-        </p:txBody>
-      </p:sp>
-      <p:sp>
-        <p:nvSpPr>
-          <p:cNvPr id="5" name="Rounded Rectangle 4"/>
-          <p:cNvSpPr/>
-          <p:nvPr/>
-        </p:nvSpPr>
-        <p:spPr>
-          <a:xfrm>
-            <a:off x="658368" y="4434840"/>
-            <a:ext cx="10881360" cy="1325880"/>
-          </a:xfrm>
-          <a:prstGeom prst="roundRect">
-            <a:avLst>
-              <a:gd name="adj" fmla="val 4500"/>
-            </a:avLst>
-          </a:prstGeom>
-          <a:solidFill>
-            <a:srgbClr val="E5F5FB"/>
-          </a:solidFill>
-          <a:ln>
-            <a:noFill/>
-          </a:ln>
-          <a:effectLst/>
-        </p:spPr>
-        <p:style>
-          <a:lnRef idx="1">
-            <a:schemeClr val="accent1"/>
-          </a:lnRef>
-          <a:fillRef idx="3">
-            <a:schemeClr val="accent1"/>
-          </a:fillRef>
-          <a:effectRef idx="2">
-            <a:schemeClr val="accent1"/>
-          </a:effectRef>
-          <a:fontRef idx="minor">
-            <a:schemeClr val="lt1"/>
-          </a:fontRef>
-        </p:style>
-        <p:txBody>
-          <a:bodyPr rtlCol="0" anchor="ctr"/>
-          <a:lstStyle/>
-          <a:p>
-            <a:pPr algn="ctr"/>
-          </a:p>
-        </p:txBody>
-      </p:sp>
-      <p:sp>
-        <p:nvSpPr>
-          <p:cNvPr id="6" name="TextBox 5"/>
-          <p:cNvSpPr txBox="1"/>
-          <p:nvPr/>
-        </p:nvSpPr>
-        <p:spPr>
-          <a:xfrm>
-            <a:off x="859536" y="4626864"/>
-            <a:ext cx="10479024" cy="1051560"/>
-          </a:xfrm>
-          <a:prstGeom prst="rect">
-            <a:avLst/>
-          </a:prstGeom>
-          <a:noFill/>
-        </p:spPr>
-        <p:txBody>
-          <a:bodyPr wrap="square">
-            <a:spAutoFit/>
-          </a:bodyPr>
-          <a:lstStyle/>
-          <a:p>
-            <a:pPr>
-              <a:spcAft>
-                <a:spcPts val="700"/>
-              </a:spcAft>
-            </a:pPr>
-            <a:r>
-              <a:rPr sz="2300" b="1" i="0">
-                <a:solidFill>
-                  <a:srgbClr val="006E96"/>
-                </a:solidFill>
-                <a:latin typeface="Arial"/>
-              </a:rPr>
-              <a:t>A scorecard honestly amber where it should be is what keeps the EA funded across a change of minister.</a:t>
-            </a:r>
-          </a:p>
-        </p:txBody>
-      </p:sp>
-      <p:sp>
-        <p:nvSpPr>
-          <p:cNvPr id="7" name="TextBox 6"/>
-          <p:cNvSpPr txBox="1"/>
-          <p:nvPr/>
-        </p:nvSpPr>
-        <p:spPr>
-          <a:xfrm>
-            <a:off x="457200" y="6473952"/>
-            <a:ext cx="7772400" cy="292608"/>
-          </a:xfrm>
-          <a:prstGeom prst="rect">
-            <a:avLst/>
-          </a:prstGeom>
-          <a:noFill/>
-        </p:spPr>
-        <p:txBody>
-          <a:bodyPr wrap="square">
-            <a:spAutoFit/>
-          </a:bodyPr>
-          <a:lstStyle/>
-          <a:p>
-            <a:r>
-              <a:rPr sz="900" b="0" i="0">
-                <a:solidFill>
-                  <a:srgbClr val="595959"/>
-                </a:solidFill>
-                <a:latin typeface="Arial"/>
-              </a:rPr>
-              <a:t>3.6 · Show the EA is working — the few metrics that matter</a:t>
-            </a:r>
-          </a:p>
-        </p:txBody>
-      </p:sp>
-    </p:spTree>
-  </p:cSld>
-  <p:clrMapOvr>
-    <a:masterClrMapping/>
-  </p:clrMapOvr>
-</p:sld>
-</file>
-
-<file path=ppt/slides/slide46.xml><?xml version="1.0" encoding="utf-8"?>
-<p:sld xmlns:a="http://schemas.openxmlformats.org/drawingml/2006/main" xmlns:p="http://schemas.openxmlformats.org/presentationml/2006/main" xmlns:r="http://schemas.openxmlformats.org/officeDocument/2006/relationships">
-  <p:cSld>
-    <p:spTree>
-      <p:nvGrpSpPr>
-        <p:cNvPr id="1" name=""/>
-        <p:cNvGrpSpPr/>
-        <p:nvPr/>
-      </p:nvGrpSpPr>
-      <p:grpSpPr/>
-      <p:sp>
-        <p:nvSpPr>
-          <p:cNvPr id="2" name="TextBox 1"/>
-          <p:cNvSpPr txBox="1"/>
-          <p:nvPr/>
-        </p:nvSpPr>
-        <p:spPr>
-          <a:xfrm>
-            <a:off x="1005840" y="2103120"/>
-            <a:ext cx="10149840" cy="2377440"/>
-          </a:xfrm>
-          <a:prstGeom prst="rect">
-            <a:avLst/>
-          </a:prstGeom>
-          <a:noFill/>
-        </p:spPr>
-        <p:txBody>
-          <a:bodyPr wrap="square">
-            <a:spAutoFit/>
-          </a:bodyPr>
-          <a:lstStyle/>
-          <a:p>
-            <a:r>
-              <a:rPr sz="3000" b="1" i="0">
-                <a:solidFill>
-                  <a:srgbClr val="1A1A1A"/>
-                </a:solidFill>
-                <a:latin typeface="Arial"/>
-              </a:rPr>
-              <a:t>A one-page quarterly scorecard — coverage, re-use rate, open exceptions, decisions — shows honestly whether the EA is working, and the re-use rate is what proves it pays.</a:t>
-            </a:r>
-          </a:p>
-        </p:txBody>
-      </p:sp>
-      <p:sp>
-        <p:nvSpPr>
-          <p:cNvPr id="3" name="TextBox 2"/>
-          <p:cNvSpPr txBox="1"/>
-          <p:nvPr/>
-        </p:nvSpPr>
-        <p:spPr>
-          <a:xfrm>
-            <a:off x="1005840" y="1554480"/>
-            <a:ext cx="5486400" cy="365760"/>
-          </a:xfrm>
-          <a:prstGeom prst="rect">
-            <a:avLst/>
-          </a:prstGeom>
-          <a:noFill/>
-        </p:spPr>
-        <p:txBody>
-          <a:bodyPr wrap="square">
-            <a:spAutoFit/>
-          </a:bodyPr>
-          <a:lstStyle/>
-          <a:p>
-            <a:r>
-              <a:rPr sz="1200" b="1" i="0">
-                <a:solidFill>
-                  <a:srgbClr val="006E96"/>
-                </a:solidFill>
-                <a:latin typeface="Arial"/>
-              </a:rPr>
-              <a:t>IN ONE SENTENCE</a:t>
-            </a:r>
-          </a:p>
-        </p:txBody>
-      </p:sp>
-      <p:sp>
-        <p:nvSpPr>
-          <p:cNvPr id="4" name="Rounded Rectangle 3"/>
-          <p:cNvSpPr/>
-          <p:nvPr/>
-        </p:nvSpPr>
-        <p:spPr>
-          <a:xfrm>
-            <a:off x="658368" y="4709160"/>
-            <a:ext cx="10881360" cy="1554480"/>
-          </a:xfrm>
-          <a:prstGeom prst="roundRect">
-            <a:avLst>
-              <a:gd name="adj" fmla="val 4500"/>
-            </a:avLst>
-          </a:prstGeom>
-          <a:solidFill>
-            <a:srgbClr val="FFFFFF"/>
-          </a:solidFill>
-          <a:ln w="9525">
-            <a:solidFill>
-              <a:srgbClr val="009CD6"/>
-            </a:solidFill>
-          </a:ln>
-          <a:effectLst/>
-        </p:spPr>
-        <p:style>
-          <a:lnRef idx="1">
-            <a:schemeClr val="accent1"/>
-          </a:lnRef>
-          <a:fillRef idx="3">
-            <a:schemeClr val="accent1"/>
-          </a:fillRef>
-          <a:effectRef idx="2">
-            <a:schemeClr val="accent1"/>
-          </a:effectRef>
-          <a:fontRef idx="minor">
-            <a:schemeClr val="lt1"/>
-          </a:fontRef>
-        </p:style>
-        <p:txBody>
-          <a:bodyPr rtlCol="0" anchor="ctr" wrap="square" lIns="228600" rIns="228600" tIns="109728" bIns="109728">
-            <a:noAutofit/>
-          </a:bodyPr>
-          <a:lstStyle/>
-          <a:p>
-            <a:pPr algn="l">
-              <a:spcAft>
-                <a:spcPts val="400"/>
-              </a:spcAft>
-            </a:pPr>
-            <a:r>
-              <a:rPr sz="1800" b="1" i="0">
-                <a:solidFill>
-                  <a:srgbClr val="006E96"/>
-                </a:solidFill>
-                <a:latin typeface="Arial"/>
-              </a:rPr>
-              <a:t>Do this on your own sector. </a:t>
-            </a:r>
-            <a:r>
-              <a:rPr sz="1800" b="1" i="0">
-                <a:solidFill>
-                  <a:srgbClr val="1A1A1A"/>
-                </a:solidFill>
-                <a:latin typeface="Arial"/>
-              </a:rPr>
-              <a:t>Build your EA health scorecard.</a:t>
-            </a:r>
-          </a:p>
-          <a:p>
-            <a:pPr algn="l">
-              <a:spcAft>
-                <a:spcPts val="400"/>
-              </a:spcAft>
-            </a:pPr>
-            <a:r>
-              <a:rPr sz="1800" b="0" i="0">
-                <a:solidFill>
-                  <a:srgbClr val="595959"/>
-                </a:solidFill>
-                <a:latin typeface="Arial"/>
-              </a:rPr>
-              <a:t>The prompt in the companion material gives you a one-page scorecard template with metrics, computations and thresholds. Before the next video.</a:t>
-            </a:r>
-          </a:p>
-        </p:txBody>
-      </p:sp>
-      <p:sp>
-        <p:nvSpPr>
-          <p:cNvPr id="5" name="TextBox 4"/>
-          <p:cNvSpPr txBox="1"/>
-          <p:nvPr/>
-        </p:nvSpPr>
-        <p:spPr>
-          <a:xfrm>
-            <a:off x="457200" y="6473952"/>
-            <a:ext cx="7772400" cy="292608"/>
-          </a:xfrm>
-          <a:prstGeom prst="rect">
-            <a:avLst/>
-          </a:prstGeom>
-          <a:noFill/>
-        </p:spPr>
-        <p:txBody>
-          <a:bodyPr wrap="square">
-            <a:spAutoFit/>
-          </a:bodyPr>
-          <a:lstStyle/>
-          <a:p>
-            <a:r>
-              <a:rPr sz="900" b="0" i="0">
-                <a:solidFill>
-                  <a:srgbClr val="595959"/>
-                </a:solidFill>
-                <a:latin typeface="Arial"/>
-              </a:rPr>
-              <a:t>3.6 · Show the EA is working — the few metrics that matter</a:t>
-            </a:r>
-          </a:p>
-        </p:txBody>
-      </p:sp>
-      <p:sp>
-        <p:nvSpPr>
-          <p:cNvPr id="6" name="TextBox 5"/>
-          <p:cNvSpPr txBox="1"/>
-          <p:nvPr/>
-        </p:nvSpPr>
-        <p:spPr>
-          <a:xfrm>
-            <a:off x="10058400" y="6473952"/>
-            <a:ext cx="1673352" cy="292608"/>
-          </a:xfrm>
-          <a:prstGeom prst="rect">
-            <a:avLst/>
-          </a:prstGeom>
-          <a:noFill/>
-        </p:spPr>
-        <p:txBody>
-          <a:bodyPr wrap="square">
-            <a:spAutoFit/>
-          </a:bodyPr>
-          <a:lstStyle/>
-          <a:p>
-            <a:pPr algn="r"/>
-            <a:r>
-              <a:rPr sz="900" b="0" i="0">
-                <a:solidFill>
-                  <a:srgbClr val="595959"/>
-                </a:solidFill>
-                <a:latin typeface="Arial"/>
-              </a:rPr>
-              <a:t>www.itu.int</a:t>
-            </a:r>
-          </a:p>
-        </p:txBody>
-      </p:sp>
-    </p:spTree>
-  </p:cSld>
-  <p:clrMapOvr>
-    <a:masterClrMapping/>
-  </p:clrMapOvr>
-</p:sld>
-</file>
-
-<file path=ppt/slides/slide47.xml><?xml version="1.0" encoding="utf-8"?>
+<file path=ppt/slides/slide53.xml><?xml version="1.0" encoding="utf-8"?>
 <p:sld xmlns:a="http://schemas.openxmlformats.org/drawingml/2006/main" xmlns:p="http://schemas.openxmlformats.org/presentationml/2006/main" xmlns:r="http://schemas.openxmlformats.org/officeDocument/2006/relationships">
   <p:cSld>
     <p:spTree>

--- a/10-Knowledge-Products/KP1-GEA/videos/module_3/en/decks/KP1_M3_3.6_Deck_v0.2.pptx
+++ b/10-Knowledge-Products/KP1-GEA/videos/module_3/en/decks/KP1_M3_3.6_Deck_v0.2.pptx
@@ -11777,7 +11777,7 @@
                 </a:solidFill>
                 <a:latin typeface="Arial"/>
               </a:rPr>
-              <a:t>~4 minutes · standalone video · voice-over on text slides</a:t>
+              <a:t>standalone video · voice-over on text slides</a:t>
             </a:r>
           </a:p>
         </p:txBody>

--- a/10-Knowledge-Products/KP1-GEA/videos/module_3/en/decks/KP1_M3_3.6_Deck_v0.2.pptx
+++ b/10-Knowledge-Products/KP1-GEA/videos/module_3/en/decks/KP1_M3_3.6_Deck_v0.2.pptx
@@ -11641,7 +11641,7 @@
                 </a:solidFill>
                 <a:latin typeface="Arial"/>
               </a:rPr>
-              <a:t>KP1 · MODULE 3 · VIDEO 3.6</a:t>
+              <a:t>MODULE 3 · VIDEO 3.6</a:t>
             </a:r>
           </a:p>
         </p:txBody>
